--- a/lecons/F2T/16_S10_L4_P1_Temperate_Location_Types_Climate.pptx
+++ b/lecons/F2T/16_S10_L4_P1_Temperate_Location_Types_Climate.pptx
@@ -643,7 +643,7 @@
           <a:p>
             <a:r>
               <a:rPr lang="en-US" dirty="0"/>
-              <a:t>Listen carefully to this situation from real life. Aïssatou's brother is going to study in France in January. He packs only T-shirts and sandals. His mother says, "You need a thick coat, gloves and closed shoes. It is winter there." Think about it, because I am going to ask you some questions.</a:t>
+              <a:t>Listen carefully to this situation from real life. Aïssatou's brother is going to study in France in January. He packs only T-shirts and sandals, but his mother says: "You need a thick coat, gloves and closed shoes. It is winter there." He asks: "Why is it cold in France when it is hot in Garoua?" Think about it, because I am going to ask you some questions.</a:t>
             </a:r>
             <a:endParaRPr lang="en-US" dirty="0"/>
           </a:p>
@@ -819,7 +819,7 @@
           <a:p>
             <a:r>
               <a:rPr lang="en-US" dirty="0"/>
-              <a:t>Good. The brother does not know that France is cold in January.</a:t>
+              <a:t>Good. The brother does not know the climate of the temperate region.</a:t>
             </a:r>
             <a:endParaRPr lang="en-US" dirty="0"/>
           </a:p>
@@ -907,7 +907,7 @@
           <a:p>
             <a:r>
               <a:rPr lang="en-US" dirty="0"/>
-              <a:t>Question 2: What season is it in France in January? Think for a moment, then raise your hand to answer.</a:t>
+              <a:t>Question 2: What did he pack? Think for a moment, then raise your hand to answer.</a:t>
             </a:r>
             <a:endParaRPr lang="en-US" dirty="0"/>
           </a:p>
@@ -995,7 +995,7 @@
           <a:p>
             <a:r>
               <a:rPr lang="en-US" dirty="0"/>
-              <a:t>Good. Winter.</a:t>
+              <a:t>Good. T-shirts and sandals.</a:t>
             </a:r>
             <a:endParaRPr lang="en-US" dirty="0"/>
           </a:p>
@@ -1083,7 +1083,7 @@
           <a:p>
             <a:r>
               <a:rPr lang="en-US" dirty="0"/>
-              <a:t>Question 3: What should he take? Think for a moment, then raise your hand to answer.</a:t>
+              <a:t>Question 3: What season is it in France in January? Think for a moment, then raise your hand to answer.</a:t>
             </a:r>
             <a:endParaRPr lang="en-US" dirty="0"/>
           </a:p>
@@ -1171,7 +1171,7 @@
           <a:p>
             <a:r>
               <a:rPr lang="en-US" dirty="0"/>
-              <a:t>Good. A thick coat, gloves and closed shoes.</a:t>
+              <a:t>Good. Winter.</a:t>
             </a:r>
             <a:endParaRPr lang="en-US" dirty="0"/>
           </a:p>
@@ -1435,7 +1435,7 @@
           <a:p>
             <a:r>
               <a:rPr lang="en-US" dirty="0"/>
-              <a:t>Activity 1. Look carefully at this diagram: the temperate regions of the world (green). Observe every detail before I ask the question.</a:t>
+              <a:t>Activity 1. Look carefully at this diagram: the temperate regions of the world. Observe every detail before I ask the question.</a:t>
             </a:r>
             <a:endParaRPr lang="en-US" dirty="0"/>
           </a:p>
@@ -1787,7 +1787,7 @@
           <a:p>
             <a:r>
               <a:rPr lang="en-US" dirty="0"/>
-              <a:t>Activity 2. Look carefully at this diagram: the four seasons of the temperate region. Observe every detail before I ask the question.</a:t>
+              <a:t>Activity 2. Look carefully at this diagram: the climate of London. Observe every detail before I ask the question.</a:t>
             </a:r>
             <a:endParaRPr lang="en-US" dirty="0"/>
           </a:p>
@@ -1875,7 +1875,7 @@
           <a:p>
             <a:r>
               <a:rPr lang="en-US" dirty="0"/>
-              <a:t>Here is the question for Activity 2: How many seasons are there? Name them. Take one minute to think and write your answer in your rough notebook.</a:t>
+              <a:t>Here is the question for Activity 2: Does it rain in every month in London? Take one minute to think and write your answer in your rough notebook.</a:t>
             </a:r>
             <a:endParaRPr lang="en-US" dirty="0"/>
           </a:p>
@@ -1963,7 +1963,7 @@
           <a:p>
             <a:r>
               <a:rPr lang="en-US" dirty="0"/>
-              <a:t>Let us check the answer together. Four: spring, summer, autumn and winter.</a:t>
+              <a:t>Let us check the answer together. Yes, it rains in every month.</a:t>
             </a:r>
             <a:endParaRPr lang="en-US" dirty="0"/>
           </a:p>
@@ -2051,7 +2051,7 @@
           <a:p>
             <a:r>
               <a:rPr lang="en-US" dirty="0"/>
-              <a:t>Activity 3. Look carefully at this picture: a street in Europe in winter. Observe every detail before I ask the question.</a:t>
+              <a:t>Activity 3. Look carefully at this picture: a sunny coast in summer. Observe every detail before I ask the question.</a:t>
             </a:r>
             <a:endParaRPr lang="en-US" dirty="0"/>
           </a:p>
@@ -2139,7 +2139,7 @@
           <a:p>
             <a:r>
               <a:rPr lang="en-US" dirty="0"/>
-              <a:t>Here is the question for Activity 3: What covers the street? What must people wear? Take one minute to think and write your answer in your rough notebook.</a:t>
+              <a:t>Here is the question for Activity 3: Which temperate climate has hot, dry summers and mild, wet winters? Take one minute to think and write your answer in your rough notebook.</a:t>
             </a:r>
             <a:endParaRPr lang="en-US" dirty="0"/>
           </a:p>
@@ -2227,7 +2227,7 @@
           <a:p>
             <a:r>
               <a:rPr lang="en-US" dirty="0"/>
-              <a:t>Let us check the answer together. Snow. People wear thick coats, gloves and boots.</a:t>
+              <a:t>Let us check the answer together. The Mediterranean climate.</a:t>
             </a:r>
             <a:endParaRPr lang="en-US" dirty="0"/>
           </a:p>
@@ -2315,7 +2315,7 @@
           <a:p>
             <a:r>
               <a:rPr lang="en-US" dirty="0"/>
-              <a:t>Activity 4. Look carefully at this diagram: the climate of London (England). Observe every detail before I ask the question.</a:t>
+              <a:t>Activity 4. Look carefully at this diagram: the seasons. Observe every detail before I ask the question.</a:t>
             </a:r>
             <a:endParaRPr lang="en-US" dirty="0"/>
           </a:p>
@@ -2403,7 +2403,7 @@
           <a:p>
             <a:r>
               <a:rPr lang="en-US" dirty="0"/>
-              <a:t>Here is the question for Activity 4: Is it cold in winter in London? Does it rain every month? Take one minute to think and write your answer in your rough notebook.</a:t>
+              <a:t>Here is the question for Activity 4: How many seasons does the temperate region have? Take one minute to think and write your answer in your rough notebook.</a:t>
             </a:r>
             <a:endParaRPr lang="en-US" dirty="0"/>
           </a:p>
@@ -2579,7 +2579,7 @@
           <a:p>
             <a:r>
               <a:rPr lang="en-US" dirty="0"/>
-              <a:t>Let us check the answer together. Yes, about 5 °C in winter. Yes, it rains every month.</a:t>
+              <a:t>Let us check the answer together. Four: spring, summer, autumn and winter.</a:t>
             </a:r>
             <a:endParaRPr lang="en-US" dirty="0"/>
           </a:p>
@@ -2667,7 +2667,7 @@
           <a:p>
             <a:r>
               <a:rPr lang="en-US" dirty="0"/>
-              <a:t>Activity 5. Look carefully at this picture: olive trees in a Mediterranean country in summer. Observe every detail before I ask the question.</a:t>
+              <a:t>Activity 5. Look carefully at this picture: a street in winter. Observe every detail before I ask the question.</a:t>
             </a:r>
             <a:endParaRPr lang="en-US" dirty="0"/>
           </a:p>
@@ -2755,7 +2755,7 @@
           <a:p>
             <a:r>
               <a:rPr lang="en-US" dirty="0"/>
-              <a:t>Here is the question for Activity 5: Here, summers are hot and dry, winters are mild and wet. What type of climate is this? Take one minute to think and write your answer in your rough notebook.</a:t>
+              <a:t>Here is the question for Activity 5: What covers the street in winter? Take one minute to think and write your answer in your rough notebook.</a:t>
             </a:r>
             <a:endParaRPr lang="en-US" dirty="0"/>
           </a:p>
@@ -2843,7 +2843,7 @@
           <a:p>
             <a:r>
               <a:rPr lang="en-US" dirty="0"/>
-              <a:t>Let us check the answer together. The Mediterranean climate.</a:t>
+              <a:t>Let us check the answer together. Snow.</a:t>
             </a:r>
             <a:endParaRPr lang="en-US" dirty="0"/>
           </a:p>
@@ -3019,7 +3019,7 @@
           <a:p>
             <a:r>
               <a:rPr lang="en-US" dirty="0"/>
-              <a:t>Let us copy Meaning. The temperate region is defined as follows. On this slide we have Temperate region. Write each point on a new line, with the key term first, and explain it in your own words when we revise. When you finish, we go to the next slide.</a:t>
+              <a:t>Let us copy the definitions. The key terms of this lesson are defined as follows. On this slide we have Temperate region. Write each point on a new line, with the key term first, and explain it in your own words when we revise.</a:t>
             </a:r>
             <a:endParaRPr lang="en-US" dirty="0"/>
           </a:p>
@@ -3107,7 +3107,7 @@
           <a:p>
             <a:r>
               <a:rPr lang="en-US" dirty="0"/>
-              <a:t>We continue with Meaning. On this slide we have Season. Write each point on a new line, with the key term first, and explain it in your own words when we revise.</a:t>
+              <a:t>Let us copy Location. The temperate regions are found in the following areas. Copy the point on Northern Hemisphere on the left, then draw the diagram on the right: the temperate regions. Give it a title and label it clearly.</a:t>
             </a:r>
             <a:endParaRPr lang="en-US" dirty="0"/>
           </a:p>
@@ -3195,7 +3195,7 @@
           <a:p>
             <a:r>
               <a:rPr lang="en-US" dirty="0"/>
-              <a:t>Let us copy Location. The temperate region is found in both hemispheres. On this slide we have Northern Hemisphere. Write each point on a new line, with the key term first, and explain it in your own words when we revise. When you finish, we go to the next slide.</a:t>
+              <a:t>We continue with Location. On this slide we have Southern Hemisphere. Write each point on a new line, with the key term first, and explain it in your own words when we revise.</a:t>
             </a:r>
             <a:endParaRPr lang="en-US" dirty="0"/>
           </a:p>
@@ -3283,7 +3283,7 @@
           <a:p>
             <a:r>
               <a:rPr lang="en-US" dirty="0"/>
-              <a:t>We continue with Location. On this slide we have Southern Hemisphere. Write each point on a new line, with the key term first, and explain it in your own words when we revise.</a:t>
+              <a:t>Let us copy Types. There are three main types of temperate climate. Copy the point on Mediterranean on the left, then draw the diagram on the right: a Mediterranean coast. Give it a title and label it clearly.</a:t>
             </a:r>
             <a:endParaRPr lang="en-US" dirty="0"/>
           </a:p>
@@ -3371,7 +3371,7 @@
           <a:p>
             <a:r>
               <a:rPr lang="en-US" dirty="0"/>
-              <a:t>Now draw this illustration in your notebook: the temperate regions of the world. Give it a title and label it clearly.</a:t>
+              <a:t>Copy the point on Cool temperate western margin on the left, then draw the diagram on the right: the climate of London. Give it a title and label it clearly.</a:t>
             </a:r>
             <a:endParaRPr lang="en-US" dirty="0"/>
           </a:p>
@@ -3547,7 +3547,7 @@
           <a:p>
             <a:r>
               <a:rPr lang="en-US" dirty="0"/>
-              <a:t>Let us copy Types of Climate. The temperate region has three main types of climate. On this slide we have Oceanic (British) climate and Mediterranean climate. Write each point on a new line, with the key term first, and explain it in your own words when we revise. When you finish, we go to the next slide.</a:t>
+              <a:t>We continue with Types. On this slide we have Cool temperate continental. Write each point on a new line, with the key term first, and explain it in your own words when we revise.</a:t>
             </a:r>
             <a:endParaRPr lang="en-US" dirty="0"/>
           </a:p>
@@ -3635,7 +3635,7 @@
           <a:p>
             <a:r>
               <a:rPr lang="en-US" dirty="0"/>
-              <a:t>We continue with Types of Climate. On this slide we have Continental climate. Write each point on a new line, with the key term first, and explain it in your own words when we revise.</a:t>
+              <a:t>Let us copy Characteristics of the Climate. The temperate climate has the following characteristics. Copy the point on Four seasons on the left, then draw the diagram on the right: the four seasons. Give it a title and label it clearly.</a:t>
             </a:r>
             <a:endParaRPr lang="en-US" dirty="0"/>
           </a:p>
@@ -3723,7 +3723,7 @@
           <a:p>
             <a:r>
               <a:rPr lang="en-US" dirty="0"/>
-              <a:t>Now let us check what you have understood. Question 1: Name the four seasons of the temperate region. Answer in your exercise book.</a:t>
+              <a:t>We continue with Characteristics of the Climate. On this slide we have Mild temperatures, Rain and Snow. Write each point on a new line, with the key term first, and explain it in your own words when we revise.</a:t>
             </a:r>
             <a:endParaRPr lang="en-US" dirty="0"/>
           </a:p>
@@ -3811,7 +3811,7 @@
           <a:p>
             <a:r>
               <a:rPr lang="en-US" dirty="0"/>
-              <a:t>The expected answer is: spring, summer, autumn and winter. If you got it right, well done.</a:t>
+              <a:t>Now let us check what you have understood. Question 1: Name the four seasons of the temperate region. Answer in your exercise book.</a:t>
             </a:r>
             <a:endParaRPr lang="en-US" dirty="0"/>
           </a:p>
@@ -3899,7 +3899,7 @@
           <a:p>
             <a:r>
               <a:rPr lang="en-US" dirty="0"/>
-              <a:t>Now let us check what you have understood. Question 2: Give one characteristic of the Mediterranean climate. Answer in your exercise book.</a:t>
+              <a:t>The expected answer is: spring, summer, autumn and winter. If you got it right, well done.</a:t>
             </a:r>
             <a:endParaRPr lang="en-US" dirty="0"/>
           </a:p>
@@ -3987,7 +3987,7 @@
           <a:p>
             <a:r>
               <a:rPr lang="en-US" dirty="0"/>
-              <a:t>The expected answer is: hot, dry summers (and mild, wet winters). If you got it right, well done.</a:t>
+              <a:t>Now let us check what you have understood. Question 2: Give one characteristic of the Mediterranean climate. Answer in your exercise book.</a:t>
             </a:r>
             <a:endParaRPr lang="en-US" dirty="0"/>
           </a:p>
@@ -4075,7 +4075,7 @@
           <a:p>
             <a:r>
               <a:rPr lang="en-US" dirty="0"/>
-              <a:t>For those who need more practice, fill in the blanks in your exercise book. The answers are: number 1, 60°; number 2, winter; number 3, Mediterranean.</a:t>
+              <a:t>The expected answer is: hot, dry summers (and mild, wet winters). If you got it right, well done.</a:t>
             </a:r>
             <a:endParaRPr lang="en-US" dirty="0"/>
           </a:p>
@@ -4163,7 +4163,7 @@
           <a:p>
             <a:r>
               <a:rPr lang="en-US" dirty="0"/>
-              <a:t>For your homework: Find a picture of a European forest in autumn in your textbook or on television. Describe the colour of the leaves and say what happens to them in winter. We shall correct it at the beginning of our next lesson.</a:t>
+              <a:t>For those who need more practice, fill in the blanks in your exercise book. The answers are: number 1, 60°; number 2, winter; number 3, Mediterranean.</a:t>
             </a:r>
             <a:endParaRPr lang="en-US" dirty="0"/>
           </a:p>
@@ -4251,7 +4251,7 @@
           <a:p>
             <a:r>
               <a:rPr lang="en-US" dirty="0"/>
-              <a:t>Our next lesson will be on Lesson 4 (Part 2): The Temperate Region: Characteristics (Soils and Vegetation). Thank you for your attention, and see you next time.</a:t>
+              <a:t>For your homework: Find a picture of a European forest in autumn in your textbook or on television. Describe the colour of the leaves and say what happens to them in winter. We shall correct it at the beginning of our next lesson.</a:t>
             </a:r>
             <a:endParaRPr lang="en-US" dirty="0"/>
           </a:p>
@@ -4339,7 +4339,7 @@
           <a:p>
             <a:r>
               <a:rPr lang="en-US" dirty="0"/>
-              <a:t>Let us play the bilingual game. I say a word in English, and you give me the French word. Then we do the reverse.</a:t>
+              <a:t>Our next lesson will be on Lesson 4 (Part 2): The Temperate Region: Characteristics (Soils and Vegetation). Thank you for your attention, and see you next time.</a:t>
             </a:r>
             <a:endParaRPr lang="en-US" dirty="0"/>
           </a:p>
@@ -4515,7 +4515,7 @@
           <a:p>
             <a:r>
               <a:rPr lang="en-US" dirty="0"/>
-              <a:t>I record this information in the official logbook of the class after the lesson.</a:t>
+              <a:t>Let us play the bilingual game. I say a word in English, and you give me the French word. Then we do the reverse.</a:t>
             </a:r>
             <a:endParaRPr lang="en-US" dirty="0"/>
           </a:p>
@@ -4603,7 +4603,7 @@
           <a:p>
             <a:r>
               <a:rPr lang="en-US" dirty="0"/>
-              <a:t>I complete the second page of the logbook: the matter taught, the evaluation, the homework and the attendance.</a:t>
+              <a:t>I record this information in the official logbook of the class after the lesson.</a:t>
             </a:r>
             <a:endParaRPr lang="en-US" dirty="0"/>
           </a:p>
@@ -4691,7 +4691,7 @@
           <a:p>
             <a:r>
               <a:rPr lang="en-US" dirty="0"/>
-              <a:t>Take your time to copy this part; we will continue together.</a:t>
+              <a:t>I complete the second page of the logbook: the matter taught, the evaluation, the homework and the attendance.</a:t>
             </a:r>
             <a:endParaRPr lang="en-US" dirty="0"/>
           </a:p>
@@ -6599,7 +6599,7 @@
         <p:spPr>
           <a:xfrm>
             <a:off x="0" y="658368"/>
-            <a:ext cx="3840480" cy="5833872"/>
+            <a:ext cx="2468880" cy="5833872"/>
           </a:xfrm>
           <a:prstGeom prst="rect">
             <a:avLst/>
@@ -6614,8 +6614,8 @@
         </p:nvSpPr>
         <p:spPr>
           <a:xfrm>
-            <a:off x="4069080" y="1005840"/>
-            <a:ext cx="7802575" cy="731520"/>
+            <a:off x="2697480" y="1005840"/>
+            <a:ext cx="9174175" cy="731520"/>
           </a:xfrm>
           <a:prstGeom prst="rect">
             <a:avLst/>
@@ -6655,8 +6655,8 @@
         </p:nvSpPr>
         <p:spPr>
           <a:xfrm>
-            <a:off x="4069080" y="1783080"/>
-            <a:ext cx="7802575" cy="4663440"/>
+            <a:off x="2697480" y="1783080"/>
+            <a:ext cx="9174175" cy="4663440"/>
           </a:xfrm>
           <a:prstGeom prst="rect">
             <a:avLst/>
@@ -6683,7 +6683,7 @@
                 <a:ea typeface="Times New Roman" pitchFamily="34" charset="-122"/>
                 <a:cs typeface="Times New Roman" pitchFamily="34" charset="-120"/>
               </a:rPr>
-              <a:t>Aïssatou's brother is going to study in France in January. He packs only T-shirts and sandals. His mother says, "You need a thick coat, gloves and closed shoes. It is winter there."</a:t>
+              <a:t>Aïssatou's brother is going to study in France in January. He packs only T-shirts and sandals, but his mother says: "You need a thick coat, gloves and closed shoes. It is winter there." He asks: "Why is it cold in France when it is hot in Garoua?"</a:t>
             </a:r>
             <a:endParaRPr lang="en-US" sz="4000" dirty="0"/>
           </a:p>
@@ -7121,7 +7121,7 @@
                 <a:ea typeface="Times New Roman" pitchFamily="34" charset="-122"/>
                 <a:cs typeface="Times New Roman" pitchFamily="34" charset="-120"/>
               </a:rPr>
-              <a:t>The brother does not know that France is cold in January.</a:t>
+              <a:t>The brother does not know the climate of the temperate region.</a:t>
             </a:r>
             <a:endParaRPr lang="en-US" sz="4000" dirty="0"/>
           </a:p>
@@ -7340,7 +7340,7 @@
                 <a:ea typeface="Times New Roman" pitchFamily="34" charset="-122"/>
                 <a:cs typeface="Times New Roman" pitchFamily="34" charset="-120"/>
               </a:rPr>
-              <a:t>What season is it in France in January?</a:t>
+              <a:t>What did he pack?</a:t>
             </a:r>
             <a:endParaRPr lang="en-US" sz="4000" dirty="0"/>
           </a:p>
@@ -7559,7 +7559,7 @@
                 <a:ea typeface="Times New Roman" pitchFamily="34" charset="-122"/>
                 <a:cs typeface="Times New Roman" pitchFamily="34" charset="-120"/>
               </a:rPr>
-              <a:t>Winter.</a:t>
+              <a:t>T-shirts and sandals.</a:t>
             </a:r>
             <a:endParaRPr lang="en-US" sz="4000" dirty="0"/>
           </a:p>
@@ -7778,7 +7778,7 @@
                 <a:ea typeface="Times New Roman" pitchFamily="34" charset="-122"/>
                 <a:cs typeface="Times New Roman" pitchFamily="34" charset="-120"/>
               </a:rPr>
-              <a:t>What should he take?</a:t>
+              <a:t>What season is it in France in January?</a:t>
             </a:r>
             <a:endParaRPr lang="en-US" sz="4000" dirty="0"/>
           </a:p>
@@ -7997,7 +7997,7 @@
                 <a:ea typeface="Times New Roman" pitchFamily="34" charset="-122"/>
                 <a:cs typeface="Times New Roman" pitchFamily="34" charset="-120"/>
               </a:rPr>
-              <a:t>A thick coat, gloves and closed shoes.</a:t>
+              <a:t>Winter.</a:t>
             </a:r>
             <a:endParaRPr lang="en-US" sz="4000" dirty="0"/>
           </a:p>
@@ -8547,7 +8547,7 @@
                 <a:ea typeface="Calibri" pitchFamily="34" charset="-122"/>
                 <a:cs typeface="Calibri" pitchFamily="34" charset="-120"/>
               </a:rPr>
-              <a:t>1. MEANING AND LOCATION</a:t>
+              <a:t>1. LOCATION</a:t>
             </a:r>
             <a:endParaRPr lang="en-US" sz="1400" dirty="0"/>
           </a:p>
@@ -8649,7 +8649,7 @@
                 <a:ea typeface="Times New Roman" pitchFamily="34" charset="-122"/>
                 <a:cs typeface="Times New Roman" pitchFamily="34" charset="-120"/>
               </a:rPr>
-              <a:t>The temperate regions of the world (green).</a:t>
+              <a:t>The temperate regions of the world.</a:t>
             </a:r>
             <a:endParaRPr lang="en-US" sz="1800" dirty="0"/>
           </a:p>
@@ -9356,7 +9356,7 @@
                 <a:ea typeface="Calibri" pitchFamily="34" charset="-122"/>
                 <a:cs typeface="Calibri" pitchFamily="34" charset="-120"/>
               </a:rPr>
-              <a:t>1. MEANING AND LOCATION</a:t>
+              <a:t>1. LOCATION</a:t>
             </a:r>
             <a:endParaRPr lang="en-US" sz="1400" dirty="0"/>
           </a:p>
@@ -9575,7 +9575,7 @@
                 <a:ea typeface="Calibri" pitchFamily="34" charset="-122"/>
                 <a:cs typeface="Calibri" pitchFamily="34" charset="-120"/>
               </a:rPr>
-              <a:t>1. MEANING AND LOCATION</a:t>
+              <a:t>1. LOCATION</a:t>
             </a:r>
             <a:endParaRPr lang="en-US" sz="1400" dirty="0"/>
           </a:p>
@@ -9794,7 +9794,7 @@
                 <a:ea typeface="Calibri" pitchFamily="34" charset="-122"/>
                 <a:cs typeface="Calibri" pitchFamily="34" charset="-120"/>
               </a:rPr>
-              <a:t>2. CLIMATE</a:t>
+              <a:t>2. TYPES</a:t>
             </a:r>
             <a:endParaRPr lang="en-US" sz="1400" dirty="0"/>
           </a:p>
@@ -9841,7 +9841,7 @@
       </p:sp>
       <p:pic>
         <p:nvPicPr>
-          <p:cNvPr id="4" name="Image 0" descr="/home/claude/f4/img/v2/four_seasons_big.png">    </p:cNvPr>
+          <p:cNvPr id="4" name="Image 0" descr="/home/claude/f4/img/v2/london_climate_big.png">    </p:cNvPr>
           <p:cNvPicPr>
             <a:picLocks noChangeAspect="1"/>
           </p:cNvPicPr>
@@ -9855,8 +9855,8 @@
         </p:blipFill>
         <p:spPr>
           <a:xfrm>
-            <a:off x="629930" y="1783080"/>
-            <a:ext cx="10931835" cy="4270248"/>
+            <a:off x="1215564" y="1783080"/>
+            <a:ext cx="9760567" cy="4270248"/>
           </a:xfrm>
           <a:prstGeom prst="rect">
             <a:avLst/>
@@ -9896,7 +9896,7 @@
                 <a:ea typeface="Times New Roman" pitchFamily="34" charset="-122"/>
                 <a:cs typeface="Times New Roman" pitchFamily="34" charset="-120"/>
               </a:rPr>
-              <a:t>The four seasons of the temperate region.</a:t>
+              <a:t>The climate of London.</a:t>
             </a:r>
             <a:endParaRPr lang="en-US" sz="1800" dirty="0"/>
           </a:p>
@@ -10008,7 +10008,7 @@
                 <a:ea typeface="Calibri" pitchFamily="34" charset="-122"/>
                 <a:cs typeface="Calibri" pitchFamily="34" charset="-120"/>
               </a:rPr>
-              <a:t>2. CLIMATE</a:t>
+              <a:t>2. TYPES</a:t>
             </a:r>
             <a:endParaRPr lang="en-US" sz="1400" dirty="0"/>
           </a:p>
@@ -10115,7 +10115,7 @@
                 <a:ea typeface="Times New Roman" pitchFamily="34" charset="-122"/>
                 <a:cs typeface="Times New Roman" pitchFamily="34" charset="-120"/>
               </a:rPr>
-              <a:t>How many seasons are there? Name them.</a:t>
+              <a:t>Does it rain in every month in London?</a:t>
             </a:r>
             <a:endParaRPr lang="en-US" sz="4000" dirty="0"/>
           </a:p>
@@ -10227,7 +10227,7 @@
                 <a:ea typeface="Calibri" pitchFamily="34" charset="-122"/>
                 <a:cs typeface="Calibri" pitchFamily="34" charset="-120"/>
               </a:rPr>
-              <a:t>2. CLIMATE</a:t>
+              <a:t>2. TYPES</a:t>
             </a:r>
             <a:endParaRPr lang="en-US" sz="1400" dirty="0"/>
           </a:p>
@@ -10334,7 +10334,7 @@
                 <a:ea typeface="Times New Roman" pitchFamily="34" charset="-122"/>
                 <a:cs typeface="Times New Roman" pitchFamily="34" charset="-120"/>
               </a:rPr>
-              <a:t>Four: spring, summer, autumn and winter.</a:t>
+              <a:t>Yes, it rains in every month.</a:t>
             </a:r>
             <a:endParaRPr lang="en-US" sz="4000" dirty="0"/>
           </a:p>
@@ -10446,7 +10446,7 @@
                 <a:ea typeface="Calibri" pitchFamily="34" charset="-122"/>
                 <a:cs typeface="Calibri" pitchFamily="34" charset="-120"/>
               </a:rPr>
-              <a:t>2. CLIMATE</a:t>
+              <a:t>2. TYPES</a:t>
             </a:r>
             <a:endParaRPr lang="en-US" sz="1400" dirty="0"/>
           </a:p>
@@ -10493,7 +10493,7 @@
       </p:sp>
       <p:pic>
         <p:nvPicPr>
-          <p:cNvPr id="4" name="Image 0" descr="/home/claude/f4/img/v2/f2t_snow_city.jpg">    </p:cNvPr>
+          <p:cNvPr id="4" name="Image 0" descr="/home/claude/f4/img/v2/f2t_mediterranean.jpg">    </p:cNvPr>
           <p:cNvPicPr>
             <a:picLocks noChangeAspect="1"/>
           </p:cNvPicPr>
@@ -10548,7 +10548,7 @@
                 <a:ea typeface="Times New Roman" pitchFamily="34" charset="-122"/>
                 <a:cs typeface="Times New Roman" pitchFamily="34" charset="-120"/>
               </a:rPr>
-              <a:t>A street in Europe in winter.</a:t>
+              <a:t>A sunny coast in summer.</a:t>
             </a:r>
             <a:endParaRPr lang="en-US" sz="1800" dirty="0"/>
           </a:p>
@@ -10660,7 +10660,7 @@
                 <a:ea typeface="Calibri" pitchFamily="34" charset="-122"/>
                 <a:cs typeface="Calibri" pitchFamily="34" charset="-120"/>
               </a:rPr>
-              <a:t>2. CLIMATE</a:t>
+              <a:t>2. TYPES</a:t>
             </a:r>
             <a:endParaRPr lang="en-US" sz="1400" dirty="0"/>
           </a:p>
@@ -10767,7 +10767,7 @@
                 <a:ea typeface="Times New Roman" pitchFamily="34" charset="-122"/>
                 <a:cs typeface="Times New Roman" pitchFamily="34" charset="-120"/>
               </a:rPr>
-              <a:t>What covers the street? What must people wear?</a:t>
+              <a:t>Which temperate climate has hot, dry summers and mild, wet winters?</a:t>
             </a:r>
             <a:endParaRPr lang="en-US" sz="4000" dirty="0"/>
           </a:p>
@@ -10879,7 +10879,7 @@
                 <a:ea typeface="Calibri" pitchFamily="34" charset="-122"/>
                 <a:cs typeface="Calibri" pitchFamily="34" charset="-120"/>
               </a:rPr>
-              <a:t>2. CLIMATE</a:t>
+              <a:t>2. TYPES</a:t>
             </a:r>
             <a:endParaRPr lang="en-US" sz="1400" dirty="0"/>
           </a:p>
@@ -10986,7 +10986,7 @@
                 <a:ea typeface="Times New Roman" pitchFamily="34" charset="-122"/>
                 <a:cs typeface="Times New Roman" pitchFamily="34" charset="-120"/>
               </a:rPr>
-              <a:t>Snow. People wear thick coats, gloves and boots.</a:t>
+              <a:t>The Mediterranean climate.</a:t>
             </a:r>
             <a:endParaRPr lang="en-US" sz="4000" dirty="0"/>
           </a:p>
@@ -11098,7 +11098,7 @@
                 <a:ea typeface="Calibri" pitchFamily="34" charset="-122"/>
                 <a:cs typeface="Calibri" pitchFamily="34" charset="-120"/>
               </a:rPr>
-              <a:t>2. CLIMATE</a:t>
+              <a:t>3. CLIMATE</a:t>
             </a:r>
             <a:endParaRPr lang="en-US" sz="1400" dirty="0"/>
           </a:p>
@@ -11145,7 +11145,7 @@
       </p:sp>
       <p:pic>
         <p:nvPicPr>
-          <p:cNvPr id="4" name="Image 0" descr="/home/claude/f4/img/v2/london_climate_big.png">    </p:cNvPr>
+          <p:cNvPr id="4" name="Image 0" descr="/home/claude/f4/img/v2/four_seasons_big.png">    </p:cNvPr>
           <p:cNvPicPr>
             <a:picLocks noChangeAspect="1"/>
           </p:cNvPicPr>
@@ -11159,8 +11159,8 @@
         </p:blipFill>
         <p:spPr>
           <a:xfrm>
-            <a:off x="1215564" y="1783080"/>
-            <a:ext cx="9760567" cy="4270248"/>
+            <a:off x="629930" y="1783080"/>
+            <a:ext cx="10931835" cy="4270248"/>
           </a:xfrm>
           <a:prstGeom prst="rect">
             <a:avLst/>
@@ -11200,7 +11200,7 @@
                 <a:ea typeface="Times New Roman" pitchFamily="34" charset="-122"/>
                 <a:cs typeface="Times New Roman" pitchFamily="34" charset="-120"/>
               </a:rPr>
-              <a:t>The climate of London (England).</a:t>
+              <a:t>The seasons.</a:t>
             </a:r>
             <a:endParaRPr lang="en-US" sz="1800" dirty="0"/>
           </a:p>
@@ -11312,7 +11312,7 @@
                 <a:ea typeface="Calibri" pitchFamily="34" charset="-122"/>
                 <a:cs typeface="Calibri" pitchFamily="34" charset="-120"/>
               </a:rPr>
-              <a:t>2. CLIMATE</a:t>
+              <a:t>3. CLIMATE</a:t>
             </a:r>
             <a:endParaRPr lang="en-US" sz="1400" dirty="0"/>
           </a:p>
@@ -11419,7 +11419,7 @@
                 <a:ea typeface="Times New Roman" pitchFamily="34" charset="-122"/>
                 <a:cs typeface="Times New Roman" pitchFamily="34" charset="-120"/>
               </a:rPr>
-              <a:t>Is it cold in winter in London? Does it rain every month?</a:t>
+              <a:t>How many seasons does the temperate region have?</a:t>
             </a:r>
             <a:endParaRPr lang="en-US" sz="4000" dirty="0"/>
           </a:p>
@@ -12540,7 +12540,7 @@
                 <a:ea typeface="Calibri" pitchFamily="34" charset="-122"/>
                 <a:cs typeface="Calibri" pitchFamily="34" charset="-120"/>
               </a:rPr>
-              <a:t>2. CLIMATE</a:t>
+              <a:t>3. CLIMATE</a:t>
             </a:r>
             <a:endParaRPr lang="en-US" sz="1400" dirty="0"/>
           </a:p>
@@ -12647,7 +12647,7 @@
                 <a:ea typeface="Times New Roman" pitchFamily="34" charset="-122"/>
                 <a:cs typeface="Times New Roman" pitchFamily="34" charset="-120"/>
               </a:rPr>
-              <a:t>Yes, about 5 °C in winter. Yes, it rains every month.</a:t>
+              <a:t>Four: spring, summer, autumn and winter.</a:t>
             </a:r>
             <a:endParaRPr lang="en-US" sz="4000" dirty="0"/>
           </a:p>
@@ -12759,7 +12759,7 @@
                 <a:ea typeface="Calibri" pitchFamily="34" charset="-122"/>
                 <a:cs typeface="Calibri" pitchFamily="34" charset="-120"/>
               </a:rPr>
-              <a:t>2. CLIMATE</a:t>
+              <a:t>3. CLIMATE</a:t>
             </a:r>
             <a:endParaRPr lang="en-US" sz="1400" dirty="0"/>
           </a:p>
@@ -12806,7 +12806,7 @@
       </p:sp>
       <p:pic>
         <p:nvPicPr>
-          <p:cNvPr id="4" name="Image 0" descr="/home/claude/f4/img/v2/f2t_mediterranean.jpg">    </p:cNvPr>
+          <p:cNvPr id="4" name="Image 0" descr="/home/claude/f4/img/v2/f2t_snow_city.jpg">    </p:cNvPr>
           <p:cNvPicPr>
             <a:picLocks noChangeAspect="1"/>
           </p:cNvPicPr>
@@ -12861,7 +12861,7 @@
                 <a:ea typeface="Times New Roman" pitchFamily="34" charset="-122"/>
                 <a:cs typeface="Times New Roman" pitchFamily="34" charset="-120"/>
               </a:rPr>
-              <a:t>Olive trees in a Mediterranean country in summer.</a:t>
+              <a:t>A street in winter.</a:t>
             </a:r>
             <a:endParaRPr lang="en-US" sz="1800" dirty="0"/>
           </a:p>
@@ -12973,7 +12973,7 @@
                 <a:ea typeface="Calibri" pitchFamily="34" charset="-122"/>
                 <a:cs typeface="Calibri" pitchFamily="34" charset="-120"/>
               </a:rPr>
-              <a:t>2. CLIMATE</a:t>
+              <a:t>3. CLIMATE</a:t>
             </a:r>
             <a:endParaRPr lang="en-US" sz="1400" dirty="0"/>
           </a:p>
@@ -13080,7 +13080,7 @@
                 <a:ea typeface="Times New Roman" pitchFamily="34" charset="-122"/>
                 <a:cs typeface="Times New Roman" pitchFamily="34" charset="-120"/>
               </a:rPr>
-              <a:t>Here, summers are hot and dry, winters are mild and wet. What type of climate is this?</a:t>
+              <a:t>What covers the street in winter?</a:t>
             </a:r>
             <a:endParaRPr lang="en-US" sz="4000" dirty="0"/>
           </a:p>
@@ -13192,7 +13192,7 @@
                 <a:ea typeface="Calibri" pitchFamily="34" charset="-122"/>
                 <a:cs typeface="Calibri" pitchFamily="34" charset="-120"/>
               </a:rPr>
-              <a:t>2. CLIMATE</a:t>
+              <a:t>3. CLIMATE</a:t>
             </a:r>
             <a:endParaRPr lang="en-US" sz="1400" dirty="0"/>
           </a:p>
@@ -13299,7 +13299,7 @@
                 <a:ea typeface="Times New Roman" pitchFamily="34" charset="-122"/>
                 <a:cs typeface="Times New Roman" pitchFamily="34" charset="-120"/>
               </a:rPr>
-              <a:t>The Mediterranean climate.</a:t>
+              <a:t>Snow.</a:t>
             </a:r>
             <a:endParaRPr lang="en-US" sz="4000" dirty="0"/>
           </a:p>
@@ -13510,7 +13510,7 @@
               <a:buNone/>
             </a:pPr>
             <a:r>
-              <a:rPr lang="en-US" sz="4000" b="1" dirty="0">
+              <a:rPr lang="en-US" sz="3200" b="1" dirty="0">
                 <a:solidFill>
                   <a:srgbClr val="111111"/>
                 </a:solidFill>
@@ -13520,7 +13520,7 @@
               </a:rPr>
               <a:t>Topic: Man in His Environment</a:t>
             </a:r>
-            <a:endParaRPr lang="en-US" sz="4000" dirty="0"/>
+            <a:endParaRPr lang="en-US" sz="3200" dirty="0"/>
           </a:p>
           <a:p>
             <a:pPr algn="l" indent="0" marL="0">
@@ -13530,7 +13530,7 @@
               <a:buNone/>
             </a:pPr>
             <a:r>
-              <a:rPr lang="en-US" sz="4000" b="1" dirty="0">
+              <a:rPr lang="en-US" sz="3200" b="1" dirty="0">
                 <a:solidFill>
                   <a:srgbClr val="111111"/>
                 </a:solidFill>
@@ -13540,7 +13540,7 @@
               </a:rPr>
               <a:t>Sub-topic: Natural Regions</a:t>
             </a:r>
-            <a:endParaRPr lang="en-US" sz="4000" dirty="0"/>
+            <a:endParaRPr lang="en-US" sz="3200" dirty="0"/>
           </a:p>
           <a:p>
             <a:pPr algn="l" indent="0" marL="0">
@@ -13550,7 +13550,7 @@
               <a:buNone/>
             </a:pPr>
             <a:r>
-              <a:rPr lang="en-US" sz="4000" b="1" dirty="0">
+              <a:rPr lang="en-US" sz="3200" b="1" dirty="0">
                 <a:solidFill>
                   <a:srgbClr val="990011"/>
                 </a:solidFill>
@@ -13560,7 +13560,7 @@
               </a:rPr>
               <a:t>Lesson 4 (Part 1): The Temperate Region: Location, Types and Characteristics (Climate)</a:t>
             </a:r>
-            <a:endParaRPr lang="en-US" sz="4000" dirty="0"/>
+            <a:endParaRPr lang="en-US" sz="3200" dirty="0"/>
           </a:p>
         </p:txBody>
       </p:sp>
@@ -13735,7 +13735,7 @@
                 <a:ea typeface="Times New Roman" pitchFamily="34" charset="-122"/>
                 <a:cs typeface="Times New Roman" pitchFamily="34" charset="-120"/>
               </a:rPr>
-              <a:t>1. Meaning and Location</a:t>
+              <a:t>DEFINITIONS</a:t>
             </a:r>
             <a:endParaRPr lang="en-US" sz="3600" dirty="0"/>
           </a:p>
@@ -13749,47 +13749,8 @@
         </p:nvSpPr>
         <p:spPr>
           <a:xfrm>
-            <a:off x="5349240" y="1737360"/>
-            <a:ext cx="6522415" cy="457200"/>
-          </a:xfrm>
-          <a:prstGeom prst="rect">
-            <a:avLst/>
-          </a:prstGeom>
-          <a:noFill/>
-          <a:ln/>
-        </p:spPr>
-        <p:txBody>
-          <a:bodyPr wrap="square" lIns="0" tIns="0" rIns="0" bIns="0" rtlCol="0" anchor="ctr"/>
-          <a:lstStyle/>
-          <a:p>
-            <a:pPr algn="l" indent="0" marL="0">
-              <a:buNone/>
-            </a:pPr>
-            <a:r>
-              <a:rPr lang="en-US" sz="3200" b="1" dirty="0">
-                <a:solidFill>
-                  <a:srgbClr val="990011"/>
-                </a:solidFill>
-                <a:latin typeface="Times New Roman" pitchFamily="34" charset="0"/>
-                <a:ea typeface="Times New Roman" pitchFamily="34" charset="-122"/>
-                <a:cs typeface="Times New Roman" pitchFamily="34" charset="-120"/>
-              </a:rPr>
-              <a:t>A) Meaning</a:t>
-            </a:r>
-            <a:endParaRPr lang="en-US" sz="3200" dirty="0"/>
-          </a:p>
-        </p:txBody>
-      </p:sp>
-      <p:sp>
-        <p:nvSpPr>
-          <p:cNvPr id="6" name="Text 3"/>
-          <p:cNvSpPr/>
-          <p:nvPr/>
-        </p:nvSpPr>
-        <p:spPr>
-          <a:xfrm>
-            <a:off x="5349240" y="2240280"/>
-            <a:ext cx="6522415" cy="4206240"/>
+            <a:off x="5349240" y="1783080"/>
+            <a:ext cx="6522415" cy="4663440"/>
           </a:xfrm>
           <a:prstGeom prst="rect">
             <a:avLst/>
@@ -13816,16 +13777,17 @@
                 <a:ea typeface="Times New Roman" pitchFamily="34" charset="-122"/>
                 <a:cs typeface="Times New Roman" pitchFamily="34" charset="-120"/>
               </a:rPr>
-              <a:t>The temperate region is defined as follows:</a:t>
+              <a:t>The key terms of this lesson are defined as follows:</a:t>
             </a:r>
             <a:endParaRPr lang="en-US" sz="4000" dirty="0"/>
           </a:p>
           <a:p>
-            <a:pPr algn="l" indent="0" marL="0">
+            <a:pPr algn="l" marL="342900" indent="-342900">
               <a:spcAft>
                 <a:spcPts val="800"/>
               </a:spcAft>
-              <a:buNone/>
+              <a:buSzPct val="100000"/>
+              <a:buChar char="•"/>
             </a:pPr>
             <a:r>
               <a:rPr lang="en-US" sz="4000" b="1" dirty="0">
@@ -13838,11 +13800,12 @@
               </a:rPr>
               <a:t>Temperate region: </a:t>
             </a:r>
-            <a:pPr algn="l" indent="0" marL="0">
+            <a:pPr algn="l" marL="342900" indent="-342900">
               <a:spcAft>
                 <a:spcPts val="800"/>
               </a:spcAft>
-              <a:buNone/>
+              <a:buSzPct val="100000"/>
+              <a:buChar char="•"/>
             </a:pPr>
             <a:r>
               <a:rPr lang="en-US" sz="4000" dirty="0">
@@ -13853,7 +13816,7 @@
                 <a:ea typeface="Times New Roman" pitchFamily="34" charset="-122"/>
                 <a:cs typeface="Times New Roman" pitchFamily="34" charset="-120"/>
               </a:rPr>
-              <a:t>It is a region between about 30° and 60° north and south of the Equator with four seasons.</a:t>
+              <a:t>It is the region with mild temperatures and four seasons, between 30° and 60° N and S.</a:t>
             </a:r>
             <a:endParaRPr lang="en-US" sz="4000" dirty="0"/>
           </a:p>
@@ -13971,9 +13934,131 @@
           </a:p>
         </p:txBody>
       </p:sp>
+      <p:sp>
+        <p:nvSpPr>
+          <p:cNvPr id="3" name="Text 1"/>
+          <p:cNvSpPr/>
+          <p:nvPr/>
+        </p:nvSpPr>
+        <p:spPr>
+          <a:xfrm>
+            <a:off x="365760" y="1005840"/>
+            <a:ext cx="11460175" cy="731520"/>
+          </a:xfrm>
+          <a:prstGeom prst="rect">
+            <a:avLst/>
+          </a:prstGeom>
+          <a:noFill/>
+          <a:ln/>
+        </p:spPr>
+        <p:txBody>
+          <a:bodyPr wrap="square" lIns="0" tIns="0" rIns="0" bIns="0" rtlCol="0" anchor="ctr">
+            <a:normAutofit/>
+          </a:bodyPr>
+          <a:lstStyle/>
+          <a:p>
+            <a:pPr algn="ctr" indent="0" marL="0">
+              <a:buNone/>
+            </a:pPr>
+            <a:r>
+              <a:rPr lang="en-US" sz="3600" b="1" dirty="0">
+                <a:solidFill>
+                  <a:srgbClr val="990011"/>
+                </a:solidFill>
+                <a:latin typeface="Times New Roman" pitchFamily="34" charset="0"/>
+                <a:ea typeface="Times New Roman" pitchFamily="34" charset="-122"/>
+                <a:cs typeface="Times New Roman" pitchFamily="34" charset="-120"/>
+              </a:rPr>
+              <a:t>1. Location</a:t>
+            </a:r>
+            <a:endParaRPr lang="en-US" sz="3600" dirty="0"/>
+          </a:p>
+        </p:txBody>
+      </p:sp>
+      <p:sp>
+        <p:nvSpPr>
+          <p:cNvPr id="4" name="Text 2"/>
+          <p:cNvSpPr/>
+          <p:nvPr/>
+        </p:nvSpPr>
+        <p:spPr>
+          <a:xfrm>
+            <a:off x="365760" y="1783080"/>
+            <a:ext cx="4846320" cy="4617720"/>
+          </a:xfrm>
+          <a:prstGeom prst="rect">
+            <a:avLst/>
+          </a:prstGeom>
+          <a:noFill/>
+          <a:ln/>
+        </p:spPr>
+        <p:txBody>
+          <a:bodyPr wrap="square" lIns="0" tIns="0" rIns="0" bIns="0" rtlCol="0" anchor="t"/>
+          <a:lstStyle/>
+          <a:p>
+            <a:pPr algn="l" indent="0" marL="0">
+              <a:spcAft>
+                <a:spcPts val="800"/>
+              </a:spcAft>
+              <a:buNone/>
+            </a:pPr>
+            <a:r>
+              <a:rPr lang="en-US" sz="3600" i="1" dirty="0">
+                <a:solidFill>
+                  <a:srgbClr val="111111"/>
+                </a:solidFill>
+                <a:latin typeface="Times New Roman" pitchFamily="34" charset="0"/>
+                <a:ea typeface="Times New Roman" pitchFamily="34" charset="-122"/>
+                <a:cs typeface="Times New Roman" pitchFamily="34" charset="-120"/>
+              </a:rPr>
+              <a:t>The temperate regions are found in the following areas:</a:t>
+            </a:r>
+            <a:endParaRPr lang="en-US" sz="3600" dirty="0"/>
+          </a:p>
+          <a:p>
+            <a:pPr algn="l" marL="342900" indent="-342900">
+              <a:spcAft>
+                <a:spcPts val="800"/>
+              </a:spcAft>
+              <a:buSzPct val="100000"/>
+              <a:buChar char="•"/>
+            </a:pPr>
+            <a:r>
+              <a:rPr lang="en-US" sz="3600" b="1" dirty="0">
+                <a:solidFill>
+                  <a:srgbClr val="111111"/>
+                </a:solidFill>
+                <a:latin typeface="Times New Roman" pitchFamily="34" charset="0"/>
+                <a:ea typeface="Times New Roman" pitchFamily="34" charset="-122"/>
+                <a:cs typeface="Times New Roman" pitchFamily="34" charset="-120"/>
+              </a:rPr>
+              <a:t>Northern Hemisphere: </a:t>
+            </a:r>
+            <a:pPr algn="l" marL="342900" indent="-342900">
+              <a:spcAft>
+                <a:spcPts val="800"/>
+              </a:spcAft>
+              <a:buSzPct val="100000"/>
+              <a:buChar char="•"/>
+            </a:pPr>
+            <a:r>
+              <a:rPr lang="en-US" sz="3600" dirty="0">
+                <a:solidFill>
+                  <a:srgbClr val="111111"/>
+                </a:solidFill>
+                <a:latin typeface="Times New Roman" pitchFamily="34" charset="0"/>
+                <a:ea typeface="Times New Roman" pitchFamily="34" charset="-122"/>
+                <a:cs typeface="Times New Roman" pitchFamily="34" charset="-120"/>
+              </a:rPr>
+              <a:t>Europe, North America, China and Japan.</a:t>
+            </a:r>
+            <a:endParaRPr lang="en-US" sz="3600" dirty="0"/>
+          </a:p>
+        </p:txBody>
+      </p:sp>
       <p:pic>
         <p:nvPicPr>
-          <p:cNvPr id="3" name="Image 0" descr="/home/claude/f4/img/minesec_sheet.png">    </p:cNvPr>
+          <p:cNvPr id="5" name="Image 0" descr="/home/claude/f4/img/v2/temperate_world_big.png">    </p:cNvPr>
           <p:cNvPicPr>
             <a:picLocks noChangeAspect="1"/>
           </p:cNvPicPr>
@@ -13987,8 +14072,8 @@
         </p:blipFill>
         <p:spPr>
           <a:xfrm>
-            <a:off x="0" y="658368"/>
-            <a:ext cx="5120640" cy="5833872"/>
+            <a:off x="5349240" y="2565478"/>
+            <a:ext cx="6659575" cy="2705452"/>
           </a:xfrm>
           <a:prstGeom prst="rect">
             <a:avLst/>
@@ -13997,14 +14082,14 @@
       </p:pic>
       <p:sp>
         <p:nvSpPr>
-          <p:cNvPr id="4" name="Text 1"/>
+          <p:cNvPr id="6" name="Text 3"/>
           <p:cNvSpPr/>
           <p:nvPr/>
         </p:nvSpPr>
         <p:spPr>
           <a:xfrm>
-            <a:off x="5349240" y="1005840"/>
-            <a:ext cx="6522415" cy="731520"/>
+            <a:off x="5349240" y="6089904"/>
+            <a:ext cx="6659575" cy="347472"/>
           </a:xfrm>
           <a:prstGeom prst="rect">
             <a:avLst/>
@@ -14013,124 +14098,24 @@
           <a:ln/>
         </p:spPr>
         <p:txBody>
-          <a:bodyPr wrap="square" lIns="0" tIns="0" rIns="0" bIns="0" rtlCol="0" anchor="ctr">
-            <a:normAutofit/>
-          </a:bodyPr>
+          <a:bodyPr wrap="square" lIns="0" tIns="0" rIns="0" bIns="0" rtlCol="0" anchor="ctr"/>
           <a:lstStyle/>
           <a:p>
             <a:pPr algn="ctr" indent="0" marL="0">
               <a:buNone/>
             </a:pPr>
             <a:r>
-              <a:rPr lang="en-US" sz="3600" b="1" dirty="0">
-                <a:solidFill>
-                  <a:srgbClr val="990011"/>
+              <a:rPr lang="en-US" sz="1600" i="1" dirty="0">
+                <a:solidFill>
+                  <a:srgbClr val="555555"/>
                 </a:solidFill>
                 <a:latin typeface="Times New Roman" pitchFamily="34" charset="0"/>
                 <a:ea typeface="Times New Roman" pitchFamily="34" charset="-122"/>
                 <a:cs typeface="Times New Roman" pitchFamily="34" charset="-120"/>
               </a:rPr>
-              <a:t>1. Meaning and Location</a:t>
-            </a:r>
-            <a:endParaRPr lang="en-US" sz="3600" dirty="0"/>
-          </a:p>
-        </p:txBody>
-      </p:sp>
-      <p:sp>
-        <p:nvSpPr>
-          <p:cNvPr id="5" name="Text 2"/>
-          <p:cNvSpPr/>
-          <p:nvPr/>
-        </p:nvSpPr>
-        <p:spPr>
-          <a:xfrm>
-            <a:off x="5349240" y="1737360"/>
-            <a:ext cx="6522415" cy="457200"/>
-          </a:xfrm>
-          <a:prstGeom prst="rect">
-            <a:avLst/>
-          </a:prstGeom>
-          <a:noFill/>
-          <a:ln/>
-        </p:spPr>
-        <p:txBody>
-          <a:bodyPr wrap="square" lIns="0" tIns="0" rIns="0" bIns="0" rtlCol="0" anchor="ctr"/>
-          <a:lstStyle/>
-          <a:p>
-            <a:pPr algn="l" indent="0" marL="0">
-              <a:buNone/>
-            </a:pPr>
-            <a:r>
-              <a:rPr lang="en-US" sz="3200" b="1" dirty="0">
-                <a:solidFill>
-                  <a:srgbClr val="990011"/>
-                </a:solidFill>
-                <a:latin typeface="Times New Roman" pitchFamily="34" charset="0"/>
-                <a:ea typeface="Times New Roman" pitchFamily="34" charset="-122"/>
-                <a:cs typeface="Times New Roman" pitchFamily="34" charset="-120"/>
-              </a:rPr>
-              <a:t>A) Meaning (continued)</a:t>
-            </a:r>
-            <a:endParaRPr lang="en-US" sz="3200" dirty="0"/>
-          </a:p>
-        </p:txBody>
-      </p:sp>
-      <p:sp>
-        <p:nvSpPr>
-          <p:cNvPr id="6" name="Text 3"/>
-          <p:cNvSpPr/>
-          <p:nvPr/>
-        </p:nvSpPr>
-        <p:spPr>
-          <a:xfrm>
-            <a:off x="5349240" y="2240280"/>
-            <a:ext cx="6522415" cy="4206240"/>
-          </a:xfrm>
-          <a:prstGeom prst="rect">
-            <a:avLst/>
-          </a:prstGeom>
-          <a:noFill/>
-          <a:ln/>
-        </p:spPr>
-        <p:txBody>
-          <a:bodyPr wrap="square" lIns="0" tIns="0" rIns="0" bIns="0" rtlCol="0" anchor="t"/>
-          <a:lstStyle/>
-          <a:p>
-            <a:pPr algn="l" indent="0" marL="0">
-              <a:spcAft>
-                <a:spcPts val="800"/>
-              </a:spcAft>
-              <a:buNone/>
-            </a:pPr>
-            <a:r>
-              <a:rPr lang="en-US" sz="4000" b="1" dirty="0">
-                <a:solidFill>
-                  <a:srgbClr val="111111"/>
-                </a:solidFill>
-                <a:latin typeface="Times New Roman" pitchFamily="34" charset="0"/>
-                <a:ea typeface="Times New Roman" pitchFamily="34" charset="-122"/>
-                <a:cs typeface="Times New Roman" pitchFamily="34" charset="-120"/>
-              </a:rPr>
-              <a:t>Season: </a:t>
-            </a:r>
-            <a:pPr algn="l" indent="0" marL="0">
-              <a:spcAft>
-                <a:spcPts val="800"/>
-              </a:spcAft>
-              <a:buNone/>
-            </a:pPr>
-            <a:r>
-              <a:rPr lang="en-US" sz="4000" dirty="0">
-                <a:solidFill>
-                  <a:srgbClr val="111111"/>
-                </a:solidFill>
-                <a:latin typeface="Times New Roman" pitchFamily="34" charset="0"/>
-                <a:ea typeface="Times New Roman" pitchFamily="34" charset="-122"/>
-                <a:cs typeface="Times New Roman" pitchFamily="34" charset="-120"/>
-              </a:rPr>
-              <a:t>It is a part of the year with its own weather: spring, summer, autumn and winter.</a:t>
-            </a:r>
-            <a:endParaRPr lang="en-US" sz="4000" dirty="0"/>
+              <a:t>Illustration: the temperate regions</a:t>
+            </a:r>
+            <a:endParaRPr lang="en-US" sz="1600" dirty="0"/>
           </a:p>
         </p:txBody>
       </p:sp>
@@ -14305,7 +14290,7 @@
                 <a:ea typeface="Times New Roman" pitchFamily="34" charset="-122"/>
                 <a:cs typeface="Times New Roman" pitchFamily="34" charset="-120"/>
               </a:rPr>
-              <a:t>1. Meaning and Location</a:t>
+              <a:t>1. Location</a:t>
             </a:r>
             <a:endParaRPr lang="en-US" sz="3600" dirty="0"/>
           </a:p>
@@ -14319,8 +14304,8 @@
         </p:nvSpPr>
         <p:spPr>
           <a:xfrm>
-            <a:off x="5349240" y="1737360"/>
-            <a:ext cx="6522415" cy="457200"/>
+            <a:off x="5349240" y="1783080"/>
+            <a:ext cx="6522415" cy="4663440"/>
           </a:xfrm>
           <a:prstGeom prst="rect">
             <a:avLst/>
@@ -14329,56 +14314,36 @@
           <a:ln/>
         </p:spPr>
         <p:txBody>
-          <a:bodyPr wrap="square" lIns="0" tIns="0" rIns="0" bIns="0" rtlCol="0" anchor="ctr"/>
-          <a:lstStyle/>
-          <a:p>
-            <a:pPr algn="l" indent="0" marL="0">
-              <a:buNone/>
+          <a:bodyPr wrap="square" lIns="0" tIns="0" rIns="0" bIns="0" rtlCol="0" anchor="t"/>
+          <a:lstStyle/>
+          <a:p>
+            <a:pPr algn="l" marL="342900" indent="-342900">
+              <a:spcAft>
+                <a:spcPts val="800"/>
+              </a:spcAft>
+              <a:buSzPct val="100000"/>
+              <a:buChar char="•"/>
             </a:pPr>
             <a:r>
-              <a:rPr lang="en-US" sz="3200" b="1" dirty="0">
-                <a:solidFill>
-                  <a:srgbClr val="990011"/>
+              <a:rPr lang="en-US" sz="4000" b="1" dirty="0">
+                <a:solidFill>
+                  <a:srgbClr val="111111"/>
                 </a:solidFill>
                 <a:latin typeface="Times New Roman" pitchFamily="34" charset="0"/>
                 <a:ea typeface="Times New Roman" pitchFamily="34" charset="-122"/>
                 <a:cs typeface="Times New Roman" pitchFamily="34" charset="-120"/>
               </a:rPr>
-              <a:t>B) Location</a:t>
-            </a:r>
-            <a:endParaRPr lang="en-US" sz="3200" dirty="0"/>
-          </a:p>
-        </p:txBody>
-      </p:sp>
-      <p:sp>
-        <p:nvSpPr>
-          <p:cNvPr id="6" name="Text 3"/>
-          <p:cNvSpPr/>
-          <p:nvPr/>
-        </p:nvSpPr>
-        <p:spPr>
-          <a:xfrm>
-            <a:off x="5349240" y="2240280"/>
-            <a:ext cx="6522415" cy="4206240"/>
-          </a:xfrm>
-          <a:prstGeom prst="rect">
-            <a:avLst/>
-          </a:prstGeom>
-          <a:noFill/>
-          <a:ln/>
-        </p:spPr>
-        <p:txBody>
-          <a:bodyPr wrap="square" lIns="0" tIns="0" rIns="0" bIns="0" rtlCol="0" anchor="t"/>
-          <a:lstStyle/>
-          <a:p>
-            <a:pPr algn="l" indent="0" marL="0">
+              <a:t>Southern Hemisphere: </a:t>
+            </a:r>
+            <a:pPr algn="l" marL="342900" indent="-342900">
               <a:spcAft>
                 <a:spcPts val="800"/>
               </a:spcAft>
-              <a:buNone/>
+              <a:buSzPct val="100000"/>
+              <a:buChar char="•"/>
             </a:pPr>
             <a:r>
-              <a:rPr lang="en-US" sz="4000" i="1" dirty="0">
+              <a:rPr lang="en-US" sz="4000" dirty="0">
                 <a:solidFill>
                   <a:srgbClr val="111111"/>
                 </a:solidFill>
@@ -14386,44 +14351,7 @@
                 <a:ea typeface="Times New Roman" pitchFamily="34" charset="-122"/>
                 <a:cs typeface="Times New Roman" pitchFamily="34" charset="-120"/>
               </a:rPr>
-              <a:t>The temperate region is found in both hemispheres:</a:t>
-            </a:r>
-            <a:endParaRPr lang="en-US" sz="4000" dirty="0"/>
-          </a:p>
-          <a:p>
-            <a:pPr algn="l" indent="0" marL="0">
-              <a:spcAft>
-                <a:spcPts val="800"/>
-              </a:spcAft>
-              <a:buNone/>
-            </a:pPr>
-            <a:r>
-              <a:rPr lang="en-US" sz="4000" b="1" dirty="0">
-                <a:solidFill>
-                  <a:srgbClr val="111111"/>
-                </a:solidFill>
-                <a:latin typeface="Times New Roman" pitchFamily="34" charset="0"/>
-                <a:ea typeface="Times New Roman" pitchFamily="34" charset="-122"/>
-                <a:cs typeface="Times New Roman" pitchFamily="34" charset="-120"/>
-              </a:rPr>
-              <a:t>Northern Hemisphere: </a:t>
-            </a:r>
-            <a:pPr algn="l" indent="0" marL="0">
-              <a:spcAft>
-                <a:spcPts val="800"/>
-              </a:spcAft>
-              <a:buNone/>
-            </a:pPr>
-            <a:r>
-              <a:rPr lang="en-US" sz="4000" dirty="0">
-                <a:solidFill>
-                  <a:srgbClr val="111111"/>
-                </a:solidFill>
-                <a:latin typeface="Times New Roman" pitchFamily="34" charset="0"/>
-                <a:ea typeface="Times New Roman" pitchFamily="34" charset="-122"/>
-                <a:cs typeface="Times New Roman" pitchFamily="34" charset="-120"/>
-              </a:rPr>
-              <a:t>It covers most of Europe, North America and part of Asia.</a:t>
+              <a:t>South Africa, southern Australia, New Zealand and Argentina.</a:t>
             </a:r>
             <a:endParaRPr lang="en-US" sz="4000" dirty="0"/>
           </a:p>
@@ -14541,9 +14469,131 @@
           </a:p>
         </p:txBody>
       </p:sp>
+      <p:sp>
+        <p:nvSpPr>
+          <p:cNvPr id="3" name="Text 1"/>
+          <p:cNvSpPr/>
+          <p:nvPr/>
+        </p:nvSpPr>
+        <p:spPr>
+          <a:xfrm>
+            <a:off x="365760" y="1005840"/>
+            <a:ext cx="11460175" cy="731520"/>
+          </a:xfrm>
+          <a:prstGeom prst="rect">
+            <a:avLst/>
+          </a:prstGeom>
+          <a:noFill/>
+          <a:ln/>
+        </p:spPr>
+        <p:txBody>
+          <a:bodyPr wrap="square" lIns="0" tIns="0" rIns="0" bIns="0" rtlCol="0" anchor="ctr">
+            <a:normAutofit/>
+          </a:bodyPr>
+          <a:lstStyle/>
+          <a:p>
+            <a:pPr algn="ctr" indent="0" marL="0">
+              <a:buNone/>
+            </a:pPr>
+            <a:r>
+              <a:rPr lang="en-US" sz="3600" b="1" dirty="0">
+                <a:solidFill>
+                  <a:srgbClr val="990011"/>
+                </a:solidFill>
+                <a:latin typeface="Times New Roman" pitchFamily="34" charset="0"/>
+                <a:ea typeface="Times New Roman" pitchFamily="34" charset="-122"/>
+                <a:cs typeface="Times New Roman" pitchFamily="34" charset="-120"/>
+              </a:rPr>
+              <a:t>2. Types</a:t>
+            </a:r>
+            <a:endParaRPr lang="en-US" sz="3600" dirty="0"/>
+          </a:p>
+        </p:txBody>
+      </p:sp>
+      <p:sp>
+        <p:nvSpPr>
+          <p:cNvPr id="4" name="Text 2"/>
+          <p:cNvSpPr/>
+          <p:nvPr/>
+        </p:nvSpPr>
+        <p:spPr>
+          <a:xfrm>
+            <a:off x="365760" y="1783080"/>
+            <a:ext cx="4846320" cy="4617720"/>
+          </a:xfrm>
+          <a:prstGeom prst="rect">
+            <a:avLst/>
+          </a:prstGeom>
+          <a:noFill/>
+          <a:ln/>
+        </p:spPr>
+        <p:txBody>
+          <a:bodyPr wrap="square" lIns="0" tIns="0" rIns="0" bIns="0" rtlCol="0" anchor="t"/>
+          <a:lstStyle/>
+          <a:p>
+            <a:pPr algn="l" indent="0" marL="0">
+              <a:spcAft>
+                <a:spcPts val="800"/>
+              </a:spcAft>
+              <a:buNone/>
+            </a:pPr>
+            <a:r>
+              <a:rPr lang="en-US" sz="3600" i="1" dirty="0">
+                <a:solidFill>
+                  <a:srgbClr val="111111"/>
+                </a:solidFill>
+                <a:latin typeface="Times New Roman" pitchFamily="34" charset="0"/>
+                <a:ea typeface="Times New Roman" pitchFamily="34" charset="-122"/>
+                <a:cs typeface="Times New Roman" pitchFamily="34" charset="-120"/>
+              </a:rPr>
+              <a:t>There are three main types of temperate climate:</a:t>
+            </a:r>
+            <a:endParaRPr lang="en-US" sz="3600" dirty="0"/>
+          </a:p>
+          <a:p>
+            <a:pPr algn="l" marL="342900" indent="-342900">
+              <a:spcAft>
+                <a:spcPts val="800"/>
+              </a:spcAft>
+              <a:buSzPct val="100000"/>
+              <a:buChar char="•"/>
+            </a:pPr>
+            <a:r>
+              <a:rPr lang="en-US" sz="3600" b="1" dirty="0">
+                <a:solidFill>
+                  <a:srgbClr val="111111"/>
+                </a:solidFill>
+                <a:latin typeface="Times New Roman" pitchFamily="34" charset="0"/>
+                <a:ea typeface="Times New Roman" pitchFamily="34" charset="-122"/>
+                <a:cs typeface="Times New Roman" pitchFamily="34" charset="-120"/>
+              </a:rPr>
+              <a:t>Mediterranean: </a:t>
+            </a:r>
+            <a:pPr algn="l" marL="342900" indent="-342900">
+              <a:spcAft>
+                <a:spcPts val="800"/>
+              </a:spcAft>
+              <a:buSzPct val="100000"/>
+              <a:buChar char="•"/>
+            </a:pPr>
+            <a:r>
+              <a:rPr lang="en-US" sz="3600" dirty="0">
+                <a:solidFill>
+                  <a:srgbClr val="111111"/>
+                </a:solidFill>
+                <a:latin typeface="Times New Roman" pitchFamily="34" charset="0"/>
+                <a:ea typeface="Times New Roman" pitchFamily="34" charset="-122"/>
+                <a:cs typeface="Times New Roman" pitchFamily="34" charset="-120"/>
+              </a:rPr>
+              <a:t>Hot, dry summers and mild, wet winters.</a:t>
+            </a:r>
+            <a:endParaRPr lang="en-US" sz="3600" dirty="0"/>
+          </a:p>
+        </p:txBody>
+      </p:sp>
       <p:pic>
         <p:nvPicPr>
-          <p:cNvPr id="3" name="Image 0" descr="/home/claude/f4/img/minesec_sheet.png">    </p:cNvPr>
+          <p:cNvPr id="5" name="Image 0" descr="/home/claude/f4/img/v2/f2t_mediterranean.jpg">    </p:cNvPr>
           <p:cNvPicPr>
             <a:picLocks noChangeAspect="1"/>
           </p:cNvPicPr>
@@ -14557,8 +14607,8 @@
         </p:blipFill>
         <p:spPr>
           <a:xfrm>
-            <a:off x="0" y="658368"/>
-            <a:ext cx="5120640" cy="5833872"/>
+            <a:off x="5349240" y="2071212"/>
+            <a:ext cx="6659575" cy="3693983"/>
           </a:xfrm>
           <a:prstGeom prst="rect">
             <a:avLst/>
@@ -14567,14 +14617,14 @@
       </p:pic>
       <p:sp>
         <p:nvSpPr>
-          <p:cNvPr id="4" name="Text 1"/>
+          <p:cNvPr id="6" name="Text 3"/>
           <p:cNvSpPr/>
           <p:nvPr/>
         </p:nvSpPr>
         <p:spPr>
           <a:xfrm>
-            <a:off x="5349240" y="1005840"/>
-            <a:ext cx="6522415" cy="731520"/>
+            <a:off x="5349240" y="6089904"/>
+            <a:ext cx="6659575" cy="347472"/>
           </a:xfrm>
           <a:prstGeom prst="rect">
             <a:avLst/>
@@ -14583,124 +14633,24 @@
           <a:ln/>
         </p:spPr>
         <p:txBody>
-          <a:bodyPr wrap="square" lIns="0" tIns="0" rIns="0" bIns="0" rtlCol="0" anchor="ctr">
-            <a:normAutofit/>
-          </a:bodyPr>
+          <a:bodyPr wrap="square" lIns="0" tIns="0" rIns="0" bIns="0" rtlCol="0" anchor="ctr"/>
           <a:lstStyle/>
           <a:p>
             <a:pPr algn="ctr" indent="0" marL="0">
               <a:buNone/>
             </a:pPr>
             <a:r>
-              <a:rPr lang="en-US" sz="3600" b="1" dirty="0">
-                <a:solidFill>
-                  <a:srgbClr val="990011"/>
+              <a:rPr lang="en-US" sz="1600" i="1" dirty="0">
+                <a:solidFill>
+                  <a:srgbClr val="555555"/>
                 </a:solidFill>
                 <a:latin typeface="Times New Roman" pitchFamily="34" charset="0"/>
                 <a:ea typeface="Times New Roman" pitchFamily="34" charset="-122"/>
                 <a:cs typeface="Times New Roman" pitchFamily="34" charset="-120"/>
               </a:rPr>
-              <a:t>1. Meaning and Location</a:t>
-            </a:r>
-            <a:endParaRPr lang="en-US" sz="3600" dirty="0"/>
-          </a:p>
-        </p:txBody>
-      </p:sp>
-      <p:sp>
-        <p:nvSpPr>
-          <p:cNvPr id="5" name="Text 2"/>
-          <p:cNvSpPr/>
-          <p:nvPr/>
-        </p:nvSpPr>
-        <p:spPr>
-          <a:xfrm>
-            <a:off x="5349240" y="1737360"/>
-            <a:ext cx="6522415" cy="457200"/>
-          </a:xfrm>
-          <a:prstGeom prst="rect">
-            <a:avLst/>
-          </a:prstGeom>
-          <a:noFill/>
-          <a:ln/>
-        </p:spPr>
-        <p:txBody>
-          <a:bodyPr wrap="square" lIns="0" tIns="0" rIns="0" bIns="0" rtlCol="0" anchor="ctr"/>
-          <a:lstStyle/>
-          <a:p>
-            <a:pPr algn="l" indent="0" marL="0">
-              <a:buNone/>
-            </a:pPr>
-            <a:r>
-              <a:rPr lang="en-US" sz="3200" b="1" dirty="0">
-                <a:solidFill>
-                  <a:srgbClr val="990011"/>
-                </a:solidFill>
-                <a:latin typeface="Times New Roman" pitchFamily="34" charset="0"/>
-                <a:ea typeface="Times New Roman" pitchFamily="34" charset="-122"/>
-                <a:cs typeface="Times New Roman" pitchFamily="34" charset="-120"/>
-              </a:rPr>
-              <a:t>B) Location (continued)</a:t>
-            </a:r>
-            <a:endParaRPr lang="en-US" sz="3200" dirty="0"/>
-          </a:p>
-        </p:txBody>
-      </p:sp>
-      <p:sp>
-        <p:nvSpPr>
-          <p:cNvPr id="6" name="Text 3"/>
-          <p:cNvSpPr/>
-          <p:nvPr/>
-        </p:nvSpPr>
-        <p:spPr>
-          <a:xfrm>
-            <a:off x="5349240" y="2240280"/>
-            <a:ext cx="6522415" cy="4206240"/>
-          </a:xfrm>
-          <a:prstGeom prst="rect">
-            <a:avLst/>
-          </a:prstGeom>
-          <a:noFill/>
-          <a:ln/>
-        </p:spPr>
-        <p:txBody>
-          <a:bodyPr wrap="square" lIns="0" tIns="0" rIns="0" bIns="0" rtlCol="0" anchor="t"/>
-          <a:lstStyle/>
-          <a:p>
-            <a:pPr algn="l" indent="0" marL="0">
-              <a:spcAft>
-                <a:spcPts val="800"/>
-              </a:spcAft>
-              <a:buNone/>
-            </a:pPr>
-            <a:r>
-              <a:rPr lang="en-US" sz="4000" b="1" dirty="0">
-                <a:solidFill>
-                  <a:srgbClr val="111111"/>
-                </a:solidFill>
-                <a:latin typeface="Times New Roman" pitchFamily="34" charset="0"/>
-                <a:ea typeface="Times New Roman" pitchFamily="34" charset="-122"/>
-                <a:cs typeface="Times New Roman" pitchFamily="34" charset="-120"/>
-              </a:rPr>
-              <a:t>Southern Hemisphere: </a:t>
-            </a:r>
-            <a:pPr algn="l" indent="0" marL="0">
-              <a:spcAft>
-                <a:spcPts val="800"/>
-              </a:spcAft>
-              <a:buNone/>
-            </a:pPr>
-            <a:r>
-              <a:rPr lang="en-US" sz="4000" dirty="0">
-                <a:solidFill>
-                  <a:srgbClr val="111111"/>
-                </a:solidFill>
-                <a:latin typeface="Times New Roman" pitchFamily="34" charset="0"/>
-                <a:ea typeface="Times New Roman" pitchFamily="34" charset="-122"/>
-                <a:cs typeface="Times New Roman" pitchFamily="34" charset="-120"/>
-              </a:rPr>
-              <a:t>It covers Argentina, South Africa, southern Australia and New Zealand.</a:t>
-            </a:r>
-            <a:endParaRPr lang="en-US" sz="4000" dirty="0"/>
+              <a:t>Illustration: a Mediterranean coast</a:t>
+            </a:r>
+            <a:endParaRPr lang="en-US" sz="1600" dirty="0"/>
           </a:p>
         </p:txBody>
       </p:sp>
@@ -14824,8 +14774,8 @@
         </p:nvSpPr>
         <p:spPr>
           <a:xfrm>
-            <a:off x="457200" y="1005840"/>
-            <a:ext cx="11277295" cy="731520"/>
+            <a:off x="365760" y="1005840"/>
+            <a:ext cx="11460175" cy="731520"/>
           </a:xfrm>
           <a:prstGeom prst="rect">
             <a:avLst/>
@@ -14834,7 +14784,9 @@
           <a:ln/>
         </p:spPr>
         <p:txBody>
-          <a:bodyPr wrap="square" lIns="0" tIns="0" rIns="0" bIns="0" rtlCol="0" anchor="ctr"/>
+          <a:bodyPr wrap="square" lIns="0" tIns="0" rIns="0" bIns="0" rtlCol="0" anchor="ctr">
+            <a:normAutofit/>
+          </a:bodyPr>
           <a:lstStyle/>
           <a:p>
             <a:pPr algn="ctr" indent="0" marL="0">
@@ -14849,7 +14801,68 @@
                 <a:ea typeface="Times New Roman" pitchFamily="34" charset="-122"/>
                 <a:cs typeface="Times New Roman" pitchFamily="34" charset="-120"/>
               </a:rPr>
-              <a:t>1. Meaning and Location</a:t>
+              <a:t>2. Types</a:t>
+            </a:r>
+            <a:endParaRPr lang="en-US" sz="3600" dirty="0"/>
+          </a:p>
+        </p:txBody>
+      </p:sp>
+      <p:sp>
+        <p:nvSpPr>
+          <p:cNvPr id="4" name="Text 2"/>
+          <p:cNvSpPr/>
+          <p:nvPr/>
+        </p:nvSpPr>
+        <p:spPr>
+          <a:xfrm>
+            <a:off x="365760" y="1783080"/>
+            <a:ext cx="4846320" cy="4617720"/>
+          </a:xfrm>
+          <a:prstGeom prst="rect">
+            <a:avLst/>
+          </a:prstGeom>
+          <a:noFill/>
+          <a:ln/>
+        </p:spPr>
+        <p:txBody>
+          <a:bodyPr wrap="square" lIns="0" tIns="0" rIns="0" bIns="0" rtlCol="0" anchor="t"/>
+          <a:lstStyle/>
+          <a:p>
+            <a:pPr algn="l" marL="342900" indent="-342900">
+              <a:spcAft>
+                <a:spcPts val="800"/>
+              </a:spcAft>
+              <a:buSzPct val="100000"/>
+              <a:buChar char="•"/>
+            </a:pPr>
+            <a:r>
+              <a:rPr lang="en-US" sz="3600" b="1" dirty="0">
+                <a:solidFill>
+                  <a:srgbClr val="111111"/>
+                </a:solidFill>
+                <a:latin typeface="Times New Roman" pitchFamily="34" charset="0"/>
+                <a:ea typeface="Times New Roman" pitchFamily="34" charset="-122"/>
+                <a:cs typeface="Times New Roman" pitchFamily="34" charset="-120"/>
+              </a:rPr>
+              <a:t>Cool temperate western margin: </a:t>
+            </a:r>
+            <a:pPr algn="l" marL="342900" indent="-342900">
+              <a:spcAft>
+                <a:spcPts val="800"/>
+              </a:spcAft>
+              <a:buSzPct val="100000"/>
+              <a:buChar char="•"/>
+            </a:pPr>
+            <a:r>
+              <a:rPr lang="en-US" sz="3600" dirty="0">
+                <a:solidFill>
+                  <a:srgbClr val="111111"/>
+                </a:solidFill>
+                <a:latin typeface="Times New Roman" pitchFamily="34" charset="0"/>
+                <a:ea typeface="Times New Roman" pitchFamily="34" charset="-122"/>
+                <a:cs typeface="Times New Roman" pitchFamily="34" charset="-120"/>
+              </a:rPr>
+              <a:t>Mild and rainy all year, like London.</a:t>
             </a:r>
             <a:endParaRPr lang="en-US" sz="3600" dirty="0"/>
           </a:p>
@@ -14857,7 +14870,7 @@
       </p:sp>
       <p:pic>
         <p:nvPicPr>
-          <p:cNvPr id="4" name="Image 0" descr="/home/claude/f4/img/v2/temperate_world_big.png">    </p:cNvPr>
+          <p:cNvPr id="5" name="Image 0" descr="/home/claude/f4/img/v2/london_climate_big.png">    </p:cNvPr>
           <p:cNvPicPr>
             <a:picLocks noChangeAspect="1"/>
           </p:cNvPicPr>
@@ -14871,8 +14884,8 @@
         </p:blipFill>
         <p:spPr>
           <a:xfrm>
-            <a:off x="840158" y="1783080"/>
-            <a:ext cx="10511380" cy="4270248"/>
+            <a:off x="5349240" y="2461422"/>
+            <a:ext cx="6659575" cy="2913564"/>
           </a:xfrm>
           <a:prstGeom prst="rect">
             <a:avLst/>
@@ -14881,14 +14894,14 @@
       </p:pic>
       <p:sp>
         <p:nvSpPr>
-          <p:cNvPr id="5" name="Text 2"/>
+          <p:cNvPr id="6" name="Text 3"/>
           <p:cNvSpPr/>
           <p:nvPr/>
         </p:nvSpPr>
         <p:spPr>
           <a:xfrm>
-            <a:off x="457200" y="6089904"/>
-            <a:ext cx="11277295" cy="347472"/>
+            <a:off x="5349240" y="6089904"/>
+            <a:ext cx="6659575" cy="347472"/>
           </a:xfrm>
           <a:prstGeom prst="rect">
             <a:avLst/>
@@ -14904,7 +14917,7 @@
               <a:buNone/>
             </a:pPr>
             <a:r>
-              <a:rPr lang="en-US" sz="1800" i="1" dirty="0">
+              <a:rPr lang="en-US" sz="1600" i="1" dirty="0">
                 <a:solidFill>
                   <a:srgbClr val="555555"/>
                 </a:solidFill>
@@ -14912,9 +14925,9 @@
                 <a:ea typeface="Times New Roman" pitchFamily="34" charset="-122"/>
                 <a:cs typeface="Times New Roman" pitchFamily="34" charset="-120"/>
               </a:rPr>
-              <a:t>Illustration: the temperate regions of the world</a:t>
-            </a:r>
-            <a:endParaRPr lang="en-US" sz="1800" dirty="0"/>
+              <a:t>Illustration: the climate of London</a:t>
+            </a:r>
+            <a:endParaRPr lang="en-US" sz="1600" dirty="0"/>
           </a:p>
         </p:txBody>
       </p:sp>
@@ -15286,7 +15299,7 @@
         <p:spPr>
           <a:xfrm>
             <a:off x="0" y="658368"/>
-            <a:ext cx="2468880" cy="5833872"/>
+            <a:ext cx="5120640" cy="5833872"/>
           </a:xfrm>
           <a:prstGeom prst="rect">
             <a:avLst/>
@@ -15301,8 +15314,8 @@
         </p:nvSpPr>
         <p:spPr>
           <a:xfrm>
-            <a:off x="2697480" y="1005840"/>
-            <a:ext cx="9174175" cy="731520"/>
+            <a:off x="5349240" y="1005840"/>
+            <a:ext cx="6522415" cy="731520"/>
           </a:xfrm>
           <a:prstGeom prst="rect">
             <a:avLst/>
@@ -15328,7 +15341,7 @@
                 <a:ea typeface="Times New Roman" pitchFamily="34" charset="-122"/>
                 <a:cs typeface="Times New Roman" pitchFamily="34" charset="-120"/>
               </a:rPr>
-              <a:t>2. Types of Climate</a:t>
+              <a:t>2. Types</a:t>
             </a:r>
             <a:endParaRPr lang="en-US" sz="3600" dirty="0"/>
           </a:p>
@@ -15342,8 +15355,8 @@
         </p:nvSpPr>
         <p:spPr>
           <a:xfrm>
-            <a:off x="2697480" y="1783080"/>
-            <a:ext cx="9174175" cy="4663440"/>
+            <a:off x="5349240" y="1783080"/>
+            <a:ext cx="6522415" cy="4663440"/>
           </a:xfrm>
           <a:prstGeom prst="rect">
             <a:avLst/>
@@ -15355,14 +15368,15 @@
           <a:bodyPr wrap="square" lIns="0" tIns="0" rIns="0" bIns="0" rtlCol="0" anchor="t"/>
           <a:lstStyle/>
           <a:p>
-            <a:pPr algn="l" indent="0" marL="0">
+            <a:pPr algn="l" marL="342900" indent="-342900">
               <a:spcAft>
                 <a:spcPts val="800"/>
               </a:spcAft>
-              <a:buNone/>
+              <a:buSzPct val="100000"/>
+              <a:buChar char="•"/>
             </a:pPr>
             <a:r>
-              <a:rPr lang="en-US" sz="4000" i="1" dirty="0">
+              <a:rPr lang="en-US" sz="4000" b="1" dirty="0">
                 <a:solidFill>
                   <a:srgbClr val="111111"/>
                 </a:solidFill>
@@ -15370,19 +15384,17 @@
                 <a:ea typeface="Times New Roman" pitchFamily="34" charset="-122"/>
                 <a:cs typeface="Times New Roman" pitchFamily="34" charset="-120"/>
               </a:rPr>
-              <a:t>The temperate region has three main types of climate:</a:t>
-            </a:r>
-            <a:endParaRPr lang="en-US" sz="4000" dirty="0"/>
-          </a:p>
-          <a:p>
-            <a:pPr algn="l" indent="0" marL="0">
+              <a:t>Cool temperate continental: </a:t>
+            </a:r>
+            <a:pPr algn="l" marL="342900" indent="-342900">
               <a:spcAft>
                 <a:spcPts val="800"/>
               </a:spcAft>
-              <a:buNone/>
+              <a:buSzPct val="100000"/>
+              <a:buChar char="•"/>
             </a:pPr>
             <a:r>
-              <a:rPr lang="en-US" sz="4000" b="1" dirty="0">
+              <a:rPr lang="en-US" sz="4000" dirty="0">
                 <a:solidFill>
                   <a:srgbClr val="111111"/>
                 </a:solidFill>
@@ -15390,61 +15402,7 @@
                 <a:ea typeface="Times New Roman" pitchFamily="34" charset="-122"/>
                 <a:cs typeface="Times New Roman" pitchFamily="34" charset="-120"/>
               </a:rPr>
-              <a:t>Oceanic (British) climate: </a:t>
-            </a:r>
-            <a:pPr algn="l" indent="0" marL="0">
-              <a:spcAft>
-                <a:spcPts val="800"/>
-              </a:spcAft>
-              <a:buNone/>
-            </a:pPr>
-            <a:r>
-              <a:rPr lang="en-US" sz="4000" dirty="0">
-                <a:solidFill>
-                  <a:srgbClr val="111111"/>
-                </a:solidFill>
-                <a:latin typeface="Times New Roman" pitchFamily="34" charset="0"/>
-                <a:ea typeface="Times New Roman" pitchFamily="34" charset="-122"/>
-                <a:cs typeface="Times New Roman" pitchFamily="34" charset="-120"/>
-              </a:rPr>
-              <a:t>It has mild summers, cool winters and rain all year brought by the westerlies.</a:t>
-            </a:r>
-            <a:endParaRPr lang="en-US" sz="4000" dirty="0"/>
-          </a:p>
-          <a:p>
-            <a:pPr algn="l" indent="0" marL="0">
-              <a:spcAft>
-                <a:spcPts val="800"/>
-              </a:spcAft>
-              <a:buNone/>
-            </a:pPr>
-            <a:r>
-              <a:rPr lang="en-US" sz="4000" b="1" dirty="0">
-                <a:solidFill>
-                  <a:srgbClr val="111111"/>
-                </a:solidFill>
-                <a:latin typeface="Times New Roman" pitchFamily="34" charset="0"/>
-                <a:ea typeface="Times New Roman" pitchFamily="34" charset="-122"/>
-                <a:cs typeface="Times New Roman" pitchFamily="34" charset="-120"/>
-              </a:rPr>
-              <a:t>Mediterranean climate: </a:t>
-            </a:r>
-            <a:pPr algn="l" indent="0" marL="0">
-              <a:spcAft>
-                <a:spcPts val="800"/>
-              </a:spcAft>
-              <a:buNone/>
-            </a:pPr>
-            <a:r>
-              <a:rPr lang="en-US" sz="4000" dirty="0">
-                <a:solidFill>
-                  <a:srgbClr val="111111"/>
-                </a:solidFill>
-                <a:latin typeface="Times New Roman" pitchFamily="34" charset="0"/>
-                <a:ea typeface="Times New Roman" pitchFamily="34" charset="-122"/>
-                <a:cs typeface="Times New Roman" pitchFamily="34" charset="-120"/>
-              </a:rPr>
-              <a:t>It has hot, dry summers and mild, wet winters.</a:t>
+              <a:t>Warm summers and very cold winters, like Moscow.</a:t>
             </a:r>
             <a:endParaRPr lang="en-US" sz="4000" dirty="0"/>
           </a:p>
@@ -15562,9 +15520,131 @@
           </a:p>
         </p:txBody>
       </p:sp>
+      <p:sp>
+        <p:nvSpPr>
+          <p:cNvPr id="3" name="Text 1"/>
+          <p:cNvSpPr/>
+          <p:nvPr/>
+        </p:nvSpPr>
+        <p:spPr>
+          <a:xfrm>
+            <a:off x="365760" y="1005840"/>
+            <a:ext cx="11460175" cy="731520"/>
+          </a:xfrm>
+          <a:prstGeom prst="rect">
+            <a:avLst/>
+          </a:prstGeom>
+          <a:noFill/>
+          <a:ln/>
+        </p:spPr>
+        <p:txBody>
+          <a:bodyPr wrap="square" lIns="0" tIns="0" rIns="0" bIns="0" rtlCol="0" anchor="ctr">
+            <a:normAutofit/>
+          </a:bodyPr>
+          <a:lstStyle/>
+          <a:p>
+            <a:pPr algn="ctr" indent="0" marL="0">
+              <a:buNone/>
+            </a:pPr>
+            <a:r>
+              <a:rPr lang="en-US" sz="3600" b="1" dirty="0">
+                <a:solidFill>
+                  <a:srgbClr val="990011"/>
+                </a:solidFill>
+                <a:latin typeface="Times New Roman" pitchFamily="34" charset="0"/>
+                <a:ea typeface="Times New Roman" pitchFamily="34" charset="-122"/>
+                <a:cs typeface="Times New Roman" pitchFamily="34" charset="-120"/>
+              </a:rPr>
+              <a:t>3. Characteristics of the Climate</a:t>
+            </a:r>
+            <a:endParaRPr lang="en-US" sz="3600" dirty="0"/>
+          </a:p>
+        </p:txBody>
+      </p:sp>
+      <p:sp>
+        <p:nvSpPr>
+          <p:cNvPr id="4" name="Text 2"/>
+          <p:cNvSpPr/>
+          <p:nvPr/>
+        </p:nvSpPr>
+        <p:spPr>
+          <a:xfrm>
+            <a:off x="365760" y="1783080"/>
+            <a:ext cx="4846320" cy="4617720"/>
+          </a:xfrm>
+          <a:prstGeom prst="rect">
+            <a:avLst/>
+          </a:prstGeom>
+          <a:noFill/>
+          <a:ln/>
+        </p:spPr>
+        <p:txBody>
+          <a:bodyPr wrap="square" lIns="0" tIns="0" rIns="0" bIns="0" rtlCol="0" anchor="t"/>
+          <a:lstStyle/>
+          <a:p>
+            <a:pPr algn="l" indent="0" marL="0">
+              <a:spcAft>
+                <a:spcPts val="800"/>
+              </a:spcAft>
+              <a:buNone/>
+            </a:pPr>
+            <a:r>
+              <a:rPr lang="en-US" sz="3600" i="1" dirty="0">
+                <a:solidFill>
+                  <a:srgbClr val="111111"/>
+                </a:solidFill>
+                <a:latin typeface="Times New Roman" pitchFamily="34" charset="0"/>
+                <a:ea typeface="Times New Roman" pitchFamily="34" charset="-122"/>
+                <a:cs typeface="Times New Roman" pitchFamily="34" charset="-120"/>
+              </a:rPr>
+              <a:t>The temperate climate has the following characteristics:</a:t>
+            </a:r>
+            <a:endParaRPr lang="en-US" sz="3600" dirty="0"/>
+          </a:p>
+          <a:p>
+            <a:pPr algn="l" marL="342900" indent="-342900">
+              <a:spcAft>
+                <a:spcPts val="800"/>
+              </a:spcAft>
+              <a:buSzPct val="100000"/>
+              <a:buChar char="•"/>
+            </a:pPr>
+            <a:r>
+              <a:rPr lang="en-US" sz="3600" b="1" dirty="0">
+                <a:solidFill>
+                  <a:srgbClr val="111111"/>
+                </a:solidFill>
+                <a:latin typeface="Times New Roman" pitchFamily="34" charset="0"/>
+                <a:ea typeface="Times New Roman" pitchFamily="34" charset="-122"/>
+                <a:cs typeface="Times New Roman" pitchFamily="34" charset="-120"/>
+              </a:rPr>
+              <a:t>Four seasons: </a:t>
+            </a:r>
+            <a:pPr algn="l" marL="342900" indent="-342900">
+              <a:spcAft>
+                <a:spcPts val="800"/>
+              </a:spcAft>
+              <a:buSzPct val="100000"/>
+              <a:buChar char="•"/>
+            </a:pPr>
+            <a:r>
+              <a:rPr lang="en-US" sz="3600" dirty="0">
+                <a:solidFill>
+                  <a:srgbClr val="111111"/>
+                </a:solidFill>
+                <a:latin typeface="Times New Roman" pitchFamily="34" charset="0"/>
+                <a:ea typeface="Times New Roman" pitchFamily="34" charset="-122"/>
+                <a:cs typeface="Times New Roman" pitchFamily="34" charset="-120"/>
+              </a:rPr>
+              <a:t>Spring, summer, autumn and winter.</a:t>
+            </a:r>
+            <a:endParaRPr lang="en-US" sz="3600" dirty="0"/>
+          </a:p>
+        </p:txBody>
+      </p:sp>
       <p:pic>
         <p:nvPicPr>
-          <p:cNvPr id="3" name="Image 0" descr="/home/claude/f4/img/minesec_sheet.png">    </p:cNvPr>
+          <p:cNvPr id="5" name="Image 0" descr="/home/claude/f4/img/v2/four_seasons_big.png">    </p:cNvPr>
           <p:cNvPicPr>
             <a:picLocks noChangeAspect="1"/>
           </p:cNvPicPr>
@@ -15578,8 +15658,8 @@
         </p:blipFill>
         <p:spPr>
           <a:xfrm>
-            <a:off x="0" y="658368"/>
-            <a:ext cx="5120640" cy="5833872"/>
+            <a:off x="5349240" y="2617506"/>
+            <a:ext cx="6659575" cy="2601397"/>
           </a:xfrm>
           <a:prstGeom prst="rect">
             <a:avLst/>
@@ -15588,14 +15668,14 @@
       </p:pic>
       <p:sp>
         <p:nvSpPr>
-          <p:cNvPr id="4" name="Text 1"/>
+          <p:cNvPr id="6" name="Text 3"/>
           <p:cNvSpPr/>
           <p:nvPr/>
         </p:nvSpPr>
         <p:spPr>
           <a:xfrm>
-            <a:off x="5349240" y="1005840"/>
-            <a:ext cx="6522415" cy="731520"/>
+            <a:off x="5349240" y="6089904"/>
+            <a:ext cx="6659575" cy="347472"/>
           </a:xfrm>
           <a:prstGeom prst="rect">
             <a:avLst/>
@@ -15604,85 +15684,24 @@
           <a:ln/>
         </p:spPr>
         <p:txBody>
-          <a:bodyPr wrap="square" lIns="0" tIns="0" rIns="0" bIns="0" rtlCol="0" anchor="ctr">
-            <a:normAutofit/>
-          </a:bodyPr>
+          <a:bodyPr wrap="square" lIns="0" tIns="0" rIns="0" bIns="0" rtlCol="0" anchor="ctr"/>
           <a:lstStyle/>
           <a:p>
             <a:pPr algn="ctr" indent="0" marL="0">
               <a:buNone/>
             </a:pPr>
             <a:r>
-              <a:rPr lang="en-US" sz="3600" b="1" dirty="0">
-                <a:solidFill>
-                  <a:srgbClr val="990011"/>
+              <a:rPr lang="en-US" sz="1600" i="1" dirty="0">
+                <a:solidFill>
+                  <a:srgbClr val="555555"/>
                 </a:solidFill>
                 <a:latin typeface="Times New Roman" pitchFamily="34" charset="0"/>
                 <a:ea typeface="Times New Roman" pitchFamily="34" charset="-122"/>
                 <a:cs typeface="Times New Roman" pitchFamily="34" charset="-120"/>
               </a:rPr>
-              <a:t>2. Types of Climate (continued)</a:t>
-            </a:r>
-            <a:endParaRPr lang="en-US" sz="3600" dirty="0"/>
-          </a:p>
-        </p:txBody>
-      </p:sp>
-      <p:sp>
-        <p:nvSpPr>
-          <p:cNvPr id="5" name="Text 2"/>
-          <p:cNvSpPr/>
-          <p:nvPr/>
-        </p:nvSpPr>
-        <p:spPr>
-          <a:xfrm>
-            <a:off x="5349240" y="1783080"/>
-            <a:ext cx="6522415" cy="4663440"/>
-          </a:xfrm>
-          <a:prstGeom prst="rect">
-            <a:avLst/>
-          </a:prstGeom>
-          <a:noFill/>
-          <a:ln/>
-        </p:spPr>
-        <p:txBody>
-          <a:bodyPr wrap="square" lIns="0" tIns="0" rIns="0" bIns="0" rtlCol="0" anchor="t"/>
-          <a:lstStyle/>
-          <a:p>
-            <a:pPr algn="l" indent="0" marL="0">
-              <a:spcAft>
-                <a:spcPts val="800"/>
-              </a:spcAft>
-              <a:buNone/>
-            </a:pPr>
-            <a:r>
-              <a:rPr lang="en-US" sz="4000" b="1" dirty="0">
-                <a:solidFill>
-                  <a:srgbClr val="111111"/>
-                </a:solidFill>
-                <a:latin typeface="Times New Roman" pitchFamily="34" charset="0"/>
-                <a:ea typeface="Times New Roman" pitchFamily="34" charset="-122"/>
-                <a:cs typeface="Times New Roman" pitchFamily="34" charset="-120"/>
-              </a:rPr>
-              <a:t>Continental climate: </a:t>
-            </a:r>
-            <a:pPr algn="l" indent="0" marL="0">
-              <a:spcAft>
-                <a:spcPts val="800"/>
-              </a:spcAft>
-              <a:buNone/>
-            </a:pPr>
-            <a:r>
-              <a:rPr lang="en-US" sz="4000" dirty="0">
-                <a:solidFill>
-                  <a:srgbClr val="111111"/>
-                </a:solidFill>
-                <a:latin typeface="Times New Roman" pitchFamily="34" charset="0"/>
-                <a:ea typeface="Times New Roman" pitchFamily="34" charset="-122"/>
-                <a:cs typeface="Times New Roman" pitchFamily="34" charset="-120"/>
-              </a:rPr>
-              <a:t>It has hot summers and very cold, snowy winters far from the sea.</a:t>
-            </a:r>
-            <a:endParaRPr lang="en-US" sz="4000" dirty="0"/>
+              <a:t>Illustration: the four seasons</a:t>
+            </a:r>
+            <a:endParaRPr lang="en-US" sz="1600" dirty="0"/>
           </a:p>
         </p:txBody>
       </p:sp>
@@ -15792,7 +15811,7 @@
                 <a:ea typeface="Calibri" pitchFamily="34" charset="-122"/>
                 <a:cs typeface="Calibri" pitchFamily="34" charset="-120"/>
               </a:rPr>
-              <a:t>FORMATIVE EVALUATION</a:t>
+              <a:t>BOARD SUMMARY</a:t>
             </a:r>
             <a:endParaRPr lang="en-US" sz="1400" dirty="0"/>
           </a:p>
@@ -15857,7 +15876,7 @@
                 <a:ea typeface="Times New Roman" pitchFamily="34" charset="-122"/>
                 <a:cs typeface="Times New Roman" pitchFamily="34" charset="-120"/>
               </a:rPr>
-              <a:t>Evaluation 1</a:t>
+              <a:t>3. Characteristics of the Climate</a:t>
             </a:r>
             <a:endParaRPr lang="en-US" sz="3600" dirty="0"/>
           </a:p>
@@ -15884,14 +15903,15 @@
           <a:bodyPr wrap="square" lIns="0" tIns="0" rIns="0" bIns="0" rtlCol="0" anchor="t"/>
           <a:lstStyle/>
           <a:p>
-            <a:pPr algn="l" indent="0" marL="0">
+            <a:pPr algn="l" marL="342900" indent="-342900">
               <a:spcAft>
                 <a:spcPts val="800"/>
               </a:spcAft>
-              <a:buNone/>
+              <a:buSzPct val="100000"/>
+              <a:buChar char="•"/>
             </a:pPr>
             <a:r>
-              <a:rPr lang="en-US" sz="4000" dirty="0">
+              <a:rPr lang="en-US" sz="4000" b="1" dirty="0">
                 <a:solidFill>
                   <a:srgbClr val="111111"/>
                 </a:solidFill>
@@ -15899,7 +15919,103 @@
                 <a:ea typeface="Times New Roman" pitchFamily="34" charset="-122"/>
                 <a:cs typeface="Times New Roman" pitchFamily="34" charset="-120"/>
               </a:rPr>
-              <a:t>Name the four seasons of the temperate region.</a:t>
+              <a:t>Mild temperatures: </a:t>
+            </a:r>
+            <a:pPr algn="l" marL="342900" indent="-342900">
+              <a:spcAft>
+                <a:spcPts val="800"/>
+              </a:spcAft>
+              <a:buSzPct val="100000"/>
+              <a:buChar char="•"/>
+            </a:pPr>
+            <a:r>
+              <a:rPr lang="en-US" sz="4000" dirty="0">
+                <a:solidFill>
+                  <a:srgbClr val="111111"/>
+                </a:solidFill>
+                <a:latin typeface="Times New Roman" pitchFamily="34" charset="0"/>
+                <a:ea typeface="Times New Roman" pitchFamily="34" charset="-122"/>
+                <a:cs typeface="Times New Roman" pitchFamily="34" charset="-120"/>
+              </a:rPr>
+              <a:t>Warm summers and cool or cold winters.</a:t>
+            </a:r>
+            <a:endParaRPr lang="en-US" sz="4000" dirty="0"/>
+          </a:p>
+          <a:p>
+            <a:pPr algn="l" marL="342900" indent="-342900">
+              <a:spcAft>
+                <a:spcPts val="800"/>
+              </a:spcAft>
+              <a:buSzPct val="100000"/>
+              <a:buChar char="•"/>
+            </a:pPr>
+            <a:r>
+              <a:rPr lang="en-US" sz="4000" b="1" dirty="0">
+                <a:solidFill>
+                  <a:srgbClr val="111111"/>
+                </a:solidFill>
+                <a:latin typeface="Times New Roman" pitchFamily="34" charset="0"/>
+                <a:ea typeface="Times New Roman" pitchFamily="34" charset="-122"/>
+                <a:cs typeface="Times New Roman" pitchFamily="34" charset="-120"/>
+              </a:rPr>
+              <a:t>Rain: </a:t>
+            </a:r>
+            <a:pPr algn="l" marL="342900" indent="-342900">
+              <a:spcAft>
+                <a:spcPts val="800"/>
+              </a:spcAft>
+              <a:buSzPct val="100000"/>
+              <a:buChar char="•"/>
+            </a:pPr>
+            <a:r>
+              <a:rPr lang="en-US" sz="4000" dirty="0">
+                <a:solidFill>
+                  <a:srgbClr val="111111"/>
+                </a:solidFill>
+                <a:latin typeface="Times New Roman" pitchFamily="34" charset="0"/>
+                <a:ea typeface="Times New Roman" pitchFamily="34" charset="-122"/>
+                <a:cs typeface="Times New Roman" pitchFamily="34" charset="-120"/>
+              </a:rPr>
+              <a:t>Rain falls in all seasons in most places.</a:t>
+            </a:r>
+            <a:endParaRPr lang="en-US" sz="4000" dirty="0"/>
+          </a:p>
+          <a:p>
+            <a:pPr algn="l" marL="342900" indent="-342900">
+              <a:spcAft>
+                <a:spcPts val="800"/>
+              </a:spcAft>
+              <a:buSzPct val="100000"/>
+              <a:buChar char="•"/>
+            </a:pPr>
+            <a:r>
+              <a:rPr lang="en-US" sz="4000" b="1" dirty="0">
+                <a:solidFill>
+                  <a:srgbClr val="111111"/>
+                </a:solidFill>
+                <a:latin typeface="Times New Roman" pitchFamily="34" charset="0"/>
+                <a:ea typeface="Times New Roman" pitchFamily="34" charset="-122"/>
+                <a:cs typeface="Times New Roman" pitchFamily="34" charset="-120"/>
+              </a:rPr>
+              <a:t>Snow: </a:t>
+            </a:r>
+            <a:pPr algn="l" marL="342900" indent="-342900">
+              <a:spcAft>
+                <a:spcPts val="800"/>
+              </a:spcAft>
+              <a:buSzPct val="100000"/>
+              <a:buChar char="•"/>
+            </a:pPr>
+            <a:r>
+              <a:rPr lang="en-US" sz="4000" dirty="0">
+                <a:solidFill>
+                  <a:srgbClr val="111111"/>
+                </a:solidFill>
+                <a:latin typeface="Times New Roman" pitchFamily="34" charset="0"/>
+                <a:ea typeface="Times New Roman" pitchFamily="34" charset="-122"/>
+                <a:cs typeface="Times New Roman" pitchFamily="34" charset="-120"/>
+              </a:rPr>
+              <a:t>Snow falls in winter in cold areas.</a:t>
             </a:r>
             <a:endParaRPr lang="en-US" sz="4000" dirty="0"/>
           </a:p>
@@ -16076,7 +16192,7 @@
                 <a:ea typeface="Times New Roman" pitchFamily="34" charset="-122"/>
                 <a:cs typeface="Times New Roman" pitchFamily="34" charset="-120"/>
               </a:rPr>
-              <a:t>Expected Answer</a:t>
+              <a:t>Evaluation 1</a:t>
             </a:r>
             <a:endParaRPr lang="en-US" sz="3600" dirty="0"/>
           </a:p>
@@ -16118,7 +16234,7 @@
                 <a:ea typeface="Times New Roman" pitchFamily="34" charset="-122"/>
                 <a:cs typeface="Times New Roman" pitchFamily="34" charset="-120"/>
               </a:rPr>
-              <a:t>Spring, summer, autumn and winter.</a:t>
+              <a:t>Name the four seasons of the temperate region.</a:t>
             </a:r>
             <a:endParaRPr lang="en-US" sz="4000" dirty="0"/>
           </a:p>
@@ -16295,7 +16411,7 @@
                 <a:ea typeface="Times New Roman" pitchFamily="34" charset="-122"/>
                 <a:cs typeface="Times New Roman" pitchFamily="34" charset="-120"/>
               </a:rPr>
-              <a:t>Evaluation 2</a:t>
+              <a:t>Expected Answer</a:t>
             </a:r>
             <a:endParaRPr lang="en-US" sz="3600" dirty="0"/>
           </a:p>
@@ -16337,7 +16453,7 @@
                 <a:ea typeface="Times New Roman" pitchFamily="34" charset="-122"/>
                 <a:cs typeface="Times New Roman" pitchFamily="34" charset="-120"/>
               </a:rPr>
-              <a:t>Give one characteristic of the Mediterranean climate.</a:t>
+              <a:t>Spring, summer, autumn and winter.</a:t>
             </a:r>
             <a:endParaRPr lang="en-US" sz="4000" dirty="0"/>
           </a:p>
@@ -16514,7 +16630,7 @@
                 <a:ea typeface="Times New Roman" pitchFamily="34" charset="-122"/>
                 <a:cs typeface="Times New Roman" pitchFamily="34" charset="-120"/>
               </a:rPr>
-              <a:t>Expected Answer</a:t>
+              <a:t>Evaluation 2</a:t>
             </a:r>
             <a:endParaRPr lang="en-US" sz="3600" dirty="0"/>
           </a:p>
@@ -16556,7 +16672,7 @@
                 <a:ea typeface="Times New Roman" pitchFamily="34" charset="-122"/>
                 <a:cs typeface="Times New Roman" pitchFamily="34" charset="-120"/>
               </a:rPr>
-              <a:t>Hot, dry summers (and mild, wet winters).</a:t>
+              <a:t>Give one characteristic of the Mediterranean climate.</a:t>
             </a:r>
             <a:endParaRPr lang="en-US" sz="4000" dirty="0"/>
           </a:p>
@@ -16668,7 +16784,7 @@
                 <a:ea typeface="Calibri" pitchFamily="34" charset="-122"/>
                 <a:cs typeface="Calibri" pitchFamily="34" charset="-120"/>
               </a:rPr>
-              <a:t>REMEDIATION</a:t>
+              <a:t>FORMATIVE EVALUATION</a:t>
             </a:r>
             <a:endParaRPr lang="en-US" sz="1400" dirty="0"/>
           </a:p>
@@ -16691,7 +16807,7 @@
         <p:spPr>
           <a:xfrm>
             <a:off x="0" y="658368"/>
-            <a:ext cx="2468880" cy="5833872"/>
+            <a:ext cx="5120640" cy="5833872"/>
           </a:xfrm>
           <a:prstGeom prst="rect">
             <a:avLst/>
@@ -16706,8 +16822,8 @@
         </p:nvSpPr>
         <p:spPr>
           <a:xfrm>
-            <a:off x="2697480" y="1005840"/>
-            <a:ext cx="9174175" cy="731520"/>
+            <a:off x="5349240" y="1005840"/>
+            <a:ext cx="6522415" cy="731520"/>
           </a:xfrm>
           <a:prstGeom prst="rect">
             <a:avLst/>
@@ -16733,7 +16849,7 @@
                 <a:ea typeface="Times New Roman" pitchFamily="34" charset="-122"/>
                 <a:cs typeface="Times New Roman" pitchFamily="34" charset="-120"/>
               </a:rPr>
-              <a:t>Remediation</a:t>
+              <a:t>Expected Answer</a:t>
             </a:r>
             <a:endParaRPr lang="en-US" sz="3600" dirty="0"/>
           </a:p>
@@ -16747,8 +16863,8 @@
         </p:nvSpPr>
         <p:spPr>
           <a:xfrm>
-            <a:off x="2697480" y="1783080"/>
-            <a:ext cx="9174175" cy="4663440"/>
+            <a:off x="5349240" y="1783080"/>
+            <a:ext cx="6522415" cy="4663440"/>
           </a:xfrm>
           <a:prstGeom prst="rect">
             <a:avLst/>
@@ -16767,7 +16883,7 @@
               <a:buNone/>
             </a:pPr>
             <a:r>
-              <a:rPr lang="en-US" sz="4000" b="1" dirty="0">
+              <a:rPr lang="en-US" sz="4000" dirty="0">
                 <a:solidFill>
                   <a:srgbClr val="111111"/>
                 </a:solidFill>
@@ -16775,73 +16891,7 @@
                 <a:ea typeface="Times New Roman" pitchFamily="34" charset="-122"/>
                 <a:cs typeface="Times New Roman" pitchFamily="34" charset="-120"/>
               </a:rPr>
-              <a:t>Fill in the blanks:</a:t>
-            </a:r>
-            <a:endParaRPr lang="en-US" sz="4000" dirty="0"/>
-          </a:p>
-          <a:p>
-            <a:pPr algn="l" marL="342900" indent="-342900">
-              <a:spcAft>
-                <a:spcPts val="800"/>
-              </a:spcAft>
-              <a:buSzPct val="100000"/>
-              <a:buFont typeface="+mj-lt"/>
-              <a:buAutoNum type="arabicPeriod" startAt="1"/>
-            </a:pPr>
-            <a:r>
-              <a:rPr lang="en-US" sz="4000" dirty="0">
-                <a:solidFill>
-                  <a:srgbClr val="111111"/>
-                </a:solidFill>
-                <a:latin typeface="Times New Roman" pitchFamily="34" charset="0"/>
-                <a:ea typeface="Times New Roman" pitchFamily="34" charset="-122"/>
-                <a:cs typeface="Times New Roman" pitchFamily="34" charset="-120"/>
-              </a:rPr>
-              <a:t>The temperate region is between 30° and ______.</a:t>
-            </a:r>
-            <a:endParaRPr lang="en-US" sz="4000" dirty="0"/>
-          </a:p>
-          <a:p>
-            <a:pPr algn="l" marL="342900" indent="-342900">
-              <a:spcAft>
-                <a:spcPts val="800"/>
-              </a:spcAft>
-              <a:buSzPct val="100000"/>
-              <a:buFont typeface="+mj-lt"/>
-              <a:buAutoNum type="arabicPeriod" startAt="1"/>
-            </a:pPr>
-            <a:r>
-              <a:rPr lang="en-US" sz="4000" dirty="0">
-                <a:solidFill>
-                  <a:srgbClr val="111111"/>
-                </a:solidFill>
-                <a:latin typeface="Times New Roman" pitchFamily="34" charset="0"/>
-                <a:ea typeface="Times New Roman" pitchFamily="34" charset="-122"/>
-                <a:cs typeface="Times New Roman" pitchFamily="34" charset="-120"/>
-              </a:rPr>
-              <a:t>The cold season is called ______.</a:t>
-            </a:r>
-            <a:endParaRPr lang="en-US" sz="4000" dirty="0"/>
-          </a:p>
-          <a:p>
-            <a:pPr algn="l" marL="342900" indent="-342900">
-              <a:spcAft>
-                <a:spcPts val="800"/>
-              </a:spcAft>
-              <a:buSzPct val="100000"/>
-              <a:buFont typeface="+mj-lt"/>
-              <a:buAutoNum type="arabicPeriod" startAt="1"/>
-            </a:pPr>
-            <a:r>
-              <a:rPr lang="en-US" sz="4000" dirty="0">
-                <a:solidFill>
-                  <a:srgbClr val="111111"/>
-                </a:solidFill>
-                <a:latin typeface="Times New Roman" pitchFamily="34" charset="0"/>
-                <a:ea typeface="Times New Roman" pitchFamily="34" charset="-122"/>
-                <a:cs typeface="Times New Roman" pitchFamily="34" charset="-120"/>
-              </a:rPr>
-              <a:t>Hot, dry summers are found in the ______ climate.</a:t>
+              <a:t>Hot, dry summers (and mild, wet winters).</a:t>
             </a:r>
             <a:endParaRPr lang="en-US" sz="4000" dirty="0"/>
           </a:p>
@@ -16953,7 +17003,7 @@
                 <a:ea typeface="Calibri" pitchFamily="34" charset="-122"/>
                 <a:cs typeface="Calibri" pitchFamily="34" charset="-120"/>
               </a:rPr>
-              <a:t>HOMEWORK</a:t>
+              <a:t>REMEDIATION</a:t>
             </a:r>
             <a:endParaRPr lang="en-US" sz="1400" dirty="0"/>
           </a:p>
@@ -16976,7 +17026,7 @@
         <p:spPr>
           <a:xfrm>
             <a:off x="0" y="658368"/>
-            <a:ext cx="5120640" cy="5833872"/>
+            <a:ext cx="2468880" cy="5833872"/>
           </a:xfrm>
           <a:prstGeom prst="rect">
             <a:avLst/>
@@ -16991,8 +17041,8 @@
         </p:nvSpPr>
         <p:spPr>
           <a:xfrm>
-            <a:off x="5349240" y="1005840"/>
-            <a:ext cx="6522415" cy="731520"/>
+            <a:off x="2697480" y="1005840"/>
+            <a:ext cx="9174175" cy="731520"/>
           </a:xfrm>
           <a:prstGeom prst="rect">
             <a:avLst/>
@@ -17018,7 +17068,7 @@
                 <a:ea typeface="Times New Roman" pitchFamily="34" charset="-122"/>
                 <a:cs typeface="Times New Roman" pitchFamily="34" charset="-120"/>
               </a:rPr>
-              <a:t>Homework</a:t>
+              <a:t>Remediation</a:t>
             </a:r>
             <a:endParaRPr lang="en-US" sz="3600" dirty="0"/>
           </a:p>
@@ -17032,8 +17082,8 @@
         </p:nvSpPr>
         <p:spPr>
           <a:xfrm>
-            <a:off x="5349240" y="1783080"/>
-            <a:ext cx="6522415" cy="4663440"/>
+            <a:off x="2697480" y="1783080"/>
+            <a:ext cx="9174175" cy="4663440"/>
           </a:xfrm>
           <a:prstGeom prst="rect">
             <a:avLst/>
@@ -17052,7 +17102,7 @@
               <a:buNone/>
             </a:pPr>
             <a:r>
-              <a:rPr lang="en-US" sz="4000" dirty="0">
+              <a:rPr lang="en-US" sz="4000" b="1" dirty="0">
                 <a:solidFill>
                   <a:srgbClr val="111111"/>
                 </a:solidFill>
@@ -17060,7 +17110,73 @@
                 <a:ea typeface="Times New Roman" pitchFamily="34" charset="-122"/>
                 <a:cs typeface="Times New Roman" pitchFamily="34" charset="-120"/>
               </a:rPr>
-              <a:t>Find a picture of a European forest in autumn in your textbook or on television. Describe the colour of the leaves and say what happens to them in winter.</a:t>
+              <a:t>Fill in the blanks:</a:t>
+            </a:r>
+            <a:endParaRPr lang="en-US" sz="4000" dirty="0"/>
+          </a:p>
+          <a:p>
+            <a:pPr algn="l" marL="342900" indent="-342900">
+              <a:spcAft>
+                <a:spcPts val="800"/>
+              </a:spcAft>
+              <a:buSzPct val="100000"/>
+              <a:buFont typeface="+mj-lt"/>
+              <a:buAutoNum type="arabicPeriod" startAt="1"/>
+            </a:pPr>
+            <a:r>
+              <a:rPr lang="en-US" sz="4000" dirty="0">
+                <a:solidFill>
+                  <a:srgbClr val="111111"/>
+                </a:solidFill>
+                <a:latin typeface="Times New Roman" pitchFamily="34" charset="0"/>
+                <a:ea typeface="Times New Roman" pitchFamily="34" charset="-122"/>
+                <a:cs typeface="Times New Roman" pitchFamily="34" charset="-120"/>
+              </a:rPr>
+              <a:t>The temperate region is between 30° and ______.</a:t>
+            </a:r>
+            <a:endParaRPr lang="en-US" sz="4000" dirty="0"/>
+          </a:p>
+          <a:p>
+            <a:pPr algn="l" marL="342900" indent="-342900">
+              <a:spcAft>
+                <a:spcPts val="800"/>
+              </a:spcAft>
+              <a:buSzPct val="100000"/>
+              <a:buFont typeface="+mj-lt"/>
+              <a:buAutoNum type="arabicPeriod" startAt="1"/>
+            </a:pPr>
+            <a:r>
+              <a:rPr lang="en-US" sz="4000" dirty="0">
+                <a:solidFill>
+                  <a:srgbClr val="111111"/>
+                </a:solidFill>
+                <a:latin typeface="Times New Roman" pitchFamily="34" charset="0"/>
+                <a:ea typeface="Times New Roman" pitchFamily="34" charset="-122"/>
+                <a:cs typeface="Times New Roman" pitchFamily="34" charset="-120"/>
+              </a:rPr>
+              <a:t>The cold season is called ______.</a:t>
+            </a:r>
+            <a:endParaRPr lang="en-US" sz="4000" dirty="0"/>
+          </a:p>
+          <a:p>
+            <a:pPr algn="l" marL="342900" indent="-342900">
+              <a:spcAft>
+                <a:spcPts val="800"/>
+              </a:spcAft>
+              <a:buSzPct val="100000"/>
+              <a:buFont typeface="+mj-lt"/>
+              <a:buAutoNum type="arabicPeriod" startAt="1"/>
+            </a:pPr>
+            <a:r>
+              <a:rPr lang="en-US" sz="4000" dirty="0">
+                <a:solidFill>
+                  <a:srgbClr val="111111"/>
+                </a:solidFill>
+                <a:latin typeface="Times New Roman" pitchFamily="34" charset="0"/>
+                <a:ea typeface="Times New Roman" pitchFamily="34" charset="-122"/>
+                <a:cs typeface="Times New Roman" pitchFamily="34" charset="-120"/>
+              </a:rPr>
+              <a:t>Hot, dry summers are found in the ______ climate.</a:t>
             </a:r>
             <a:endParaRPr lang="en-US" sz="4000" dirty="0"/>
           </a:p>
@@ -17172,7 +17288,7 @@
                 <a:ea typeface="Calibri" pitchFamily="34" charset="-122"/>
                 <a:cs typeface="Calibri" pitchFamily="34" charset="-120"/>
               </a:rPr>
-              <a:t>NEXT LESSON</a:t>
+              <a:t>HOMEWORK</a:t>
             </a:r>
             <a:endParaRPr lang="en-US" sz="1400" dirty="0"/>
           </a:p>
@@ -17237,7 +17353,7 @@
                 <a:ea typeface="Times New Roman" pitchFamily="34" charset="-122"/>
                 <a:cs typeface="Times New Roman" pitchFamily="34" charset="-120"/>
               </a:rPr>
-              <a:t>Next Lesson</a:t>
+              <a:t>Homework</a:t>
             </a:r>
             <a:endParaRPr lang="en-US" sz="3600" dirty="0"/>
           </a:p>
@@ -17261,17 +17377,17 @@
           <a:ln/>
         </p:spPr>
         <p:txBody>
-          <a:bodyPr wrap="square" lIns="0" tIns="0" rIns="0" bIns="0" rtlCol="0" anchor="ctr"/>
-          <a:lstStyle/>
-          <a:p>
-            <a:pPr algn="ctr" indent="0" marL="0">
+          <a:bodyPr wrap="square" lIns="0" tIns="0" rIns="0" bIns="0" rtlCol="0" anchor="t"/>
+          <a:lstStyle/>
+          <a:p>
+            <a:pPr algn="l" indent="0" marL="0">
               <a:spcAft>
                 <a:spcPts val="800"/>
               </a:spcAft>
               <a:buNone/>
             </a:pPr>
             <a:r>
-              <a:rPr lang="en-US" sz="4000" b="1" dirty="0">
+              <a:rPr lang="en-US" sz="4000" dirty="0">
                 <a:solidFill>
                   <a:srgbClr val="111111"/>
                 </a:solidFill>
@@ -17279,27 +17395,7 @@
                 <a:ea typeface="Times New Roman" pitchFamily="34" charset="-122"/>
                 <a:cs typeface="Times New Roman" pitchFamily="34" charset="-120"/>
               </a:rPr>
-              <a:t>Our next lesson will be on:</a:t>
-            </a:r>
-            <a:endParaRPr lang="en-US" sz="4000" dirty="0"/>
-          </a:p>
-          <a:p>
-            <a:pPr algn="ctr" indent="0" marL="0">
-              <a:spcAft>
-                <a:spcPts val="800"/>
-              </a:spcAft>
-              <a:buNone/>
-            </a:pPr>
-            <a:r>
-              <a:rPr lang="en-US" sz="4000" b="1" dirty="0">
-                <a:solidFill>
-                  <a:srgbClr val="990011"/>
-                </a:solidFill>
-                <a:latin typeface="Times New Roman" pitchFamily="34" charset="0"/>
-                <a:ea typeface="Times New Roman" pitchFamily="34" charset="-122"/>
-                <a:cs typeface="Times New Roman" pitchFamily="34" charset="-120"/>
-              </a:rPr>
-              <a:t>Lesson 4 (Part 2): The Temperate Region: Characteristics (Soils and Vegetation)</a:t>
+              <a:t>Find a picture of a European forest in autumn in your textbook or on television. Describe the colour of the leaves and say what happens to them in winter.</a:t>
             </a:r>
             <a:endParaRPr lang="en-US" sz="4000" dirty="0"/>
           </a:p>
@@ -17411,6 +17507,464 @@
                 <a:ea typeface="Calibri" pitchFamily="34" charset="-122"/>
                 <a:cs typeface="Calibri" pitchFamily="34" charset="-120"/>
               </a:rPr>
+              <a:t>NEXT LESSON</a:t>
+            </a:r>
+            <a:endParaRPr lang="en-US" sz="1400" dirty="0"/>
+          </a:p>
+        </p:txBody>
+      </p:sp>
+      <p:pic>
+        <p:nvPicPr>
+          <p:cNvPr id="3" name="Image 0" descr="/home/claude/f4/img/minesec_sheet.png">    </p:cNvPr>
+          <p:cNvPicPr>
+            <a:picLocks noChangeAspect="1"/>
+          </p:cNvPicPr>
+          <p:nvPr/>
+        </p:nvPicPr>
+        <p:blipFill>
+          <a:blip r:embed="rId1"/>
+          <a:stretch>
+            <a:fillRect/>
+          </a:stretch>
+        </p:blipFill>
+        <p:spPr>
+          <a:xfrm>
+            <a:off x="0" y="658368"/>
+            <a:ext cx="5120640" cy="5833872"/>
+          </a:xfrm>
+          <a:prstGeom prst="rect">
+            <a:avLst/>
+          </a:prstGeom>
+        </p:spPr>
+      </p:pic>
+      <p:sp>
+        <p:nvSpPr>
+          <p:cNvPr id="4" name="Text 1"/>
+          <p:cNvSpPr/>
+          <p:nvPr/>
+        </p:nvSpPr>
+        <p:spPr>
+          <a:xfrm>
+            <a:off x="5349240" y="1005840"/>
+            <a:ext cx="6522415" cy="731520"/>
+          </a:xfrm>
+          <a:prstGeom prst="rect">
+            <a:avLst/>
+          </a:prstGeom>
+          <a:noFill/>
+          <a:ln/>
+        </p:spPr>
+        <p:txBody>
+          <a:bodyPr wrap="square" lIns="0" tIns="0" rIns="0" bIns="0" rtlCol="0" anchor="ctr">
+            <a:normAutofit/>
+          </a:bodyPr>
+          <a:lstStyle/>
+          <a:p>
+            <a:pPr algn="ctr" indent="0" marL="0">
+              <a:buNone/>
+            </a:pPr>
+            <a:r>
+              <a:rPr lang="en-US" sz="3600" b="1" dirty="0">
+                <a:solidFill>
+                  <a:srgbClr val="990011"/>
+                </a:solidFill>
+                <a:latin typeface="Times New Roman" pitchFamily="34" charset="0"/>
+                <a:ea typeface="Times New Roman" pitchFamily="34" charset="-122"/>
+                <a:cs typeface="Times New Roman" pitchFamily="34" charset="-120"/>
+              </a:rPr>
+              <a:t>Next Lesson</a:t>
+            </a:r>
+            <a:endParaRPr lang="en-US" sz="3600" dirty="0"/>
+          </a:p>
+        </p:txBody>
+      </p:sp>
+      <p:sp>
+        <p:nvSpPr>
+          <p:cNvPr id="5" name="Text 2"/>
+          <p:cNvSpPr/>
+          <p:nvPr/>
+        </p:nvSpPr>
+        <p:spPr>
+          <a:xfrm>
+            <a:off x="5349240" y="1783080"/>
+            <a:ext cx="6522415" cy="4663440"/>
+          </a:xfrm>
+          <a:prstGeom prst="rect">
+            <a:avLst/>
+          </a:prstGeom>
+          <a:noFill/>
+          <a:ln/>
+        </p:spPr>
+        <p:txBody>
+          <a:bodyPr wrap="square" lIns="0" tIns="0" rIns="0" bIns="0" rtlCol="0" anchor="ctr"/>
+          <a:lstStyle/>
+          <a:p>
+            <a:pPr algn="ctr" indent="0" marL="0">
+              <a:spcAft>
+                <a:spcPts val="800"/>
+              </a:spcAft>
+              <a:buNone/>
+            </a:pPr>
+            <a:r>
+              <a:rPr lang="en-US" sz="4000" b="1" dirty="0">
+                <a:solidFill>
+                  <a:srgbClr val="111111"/>
+                </a:solidFill>
+                <a:latin typeface="Times New Roman" pitchFamily="34" charset="0"/>
+                <a:ea typeface="Times New Roman" pitchFamily="34" charset="-122"/>
+                <a:cs typeface="Times New Roman" pitchFamily="34" charset="-120"/>
+              </a:rPr>
+              <a:t>Our next lesson will be on:</a:t>
+            </a:r>
+            <a:endParaRPr lang="en-US" sz="4000" dirty="0"/>
+          </a:p>
+          <a:p>
+            <a:pPr algn="ctr" indent="0" marL="0">
+              <a:spcAft>
+                <a:spcPts val="800"/>
+              </a:spcAft>
+              <a:buNone/>
+            </a:pPr>
+            <a:r>
+              <a:rPr lang="en-US" sz="4000" b="1" dirty="0">
+                <a:solidFill>
+                  <a:srgbClr val="990011"/>
+                </a:solidFill>
+                <a:latin typeface="Times New Roman" pitchFamily="34" charset="0"/>
+                <a:ea typeface="Times New Roman" pitchFamily="34" charset="-122"/>
+                <a:cs typeface="Times New Roman" pitchFamily="34" charset="-120"/>
+              </a:rPr>
+              <a:t>Lesson 4 (Part 2): The Temperate Region: Characteristics (Soils and Vegetation)</a:t>
+            </a:r>
+            <a:endParaRPr lang="en-US" sz="4000" dirty="0"/>
+          </a:p>
+        </p:txBody>
+      </p:sp>
+      <p:sp>
+        <p:nvSpPr>
+          <p:cNvPr id="25" name="Slide Number Placeholder 0"/>
+          <p:cNvSpPr>
+            <a:spLocks noGrp="1"/>
+          </p:cNvSpPr>
+          <p:nvPr>
+            <p:ph type="sldNum" sz="quarter" idx="4294967295"/>
+          </p:nvPr>
+        </p:nvSpPr>
+        <p:spPr>
+          <a:xfrm>
+            <a:off x="27432" y="91440"/>
+            <a:ext cx="585216" cy="475488"/>
+          </a:xfrm>
+          <a:prstGeom prst="rect">
+            <a:avLst/>
+          </a:prstGeom>
+          <a:extLst>
+            <a:ext uri="{C572A759-6A51-4108-AA02-DFA0A04FC94B}">
+              <ma14:wrappingTextBoxFlag xmlns:ma14="http://schemas.microsoft.com/office/mac/drawingml/2011/main" val="0"/>
+            </a:ext>
+          </a:extLst>
+        </p:spPr>
+        <p:txBody>
+          <a:bodyPr/>
+          <a:lstStyle>
+            <a:lvl1pPr>
+              <a:defRPr sz="2000">
+                <a:solidFill>
+                  <a:srgbClr val="FFFFFF"/>
+                </a:solidFill>
+                <a:latin typeface="Calibri"/>
+                <a:ea typeface="Calibri"/>
+                <a:cs typeface="Calibri"/>
+              </a:defRPr>
+            </a:lvl1pPr>
+          </a:lstStyle>
+          <a:p>
+            <a:pPr algn="ctr"/>
+            <a:fld id="{F7021451-1387-4CA6-816F-3879F97B5CBC}" type="slidenum">
+              <a:rPr b="1" lang="en-US"/>
+              <a:t>49</a:t>
+            </a:fld>
+            <a:endParaRPr lang="en-US"/>
+          </a:p>
+        </p:txBody>
+      </p:sp>
+    </p:spTree>
+  </p:cSld>
+  <p:clrMapOvr>
+    <a:masterClrMapping/>
+  </p:clrMapOvr>
+</p:sld>
+</file>
+
+<file path=ppt/slides/slide5.xml><?xml version="1.0" encoding="utf-8"?>
+<p:sld xmlns:a="http://schemas.openxmlformats.org/drawingml/2006/main" xmlns:r="http://schemas.openxmlformats.org/officeDocument/2006/relationships" xmlns:p="http://schemas.openxmlformats.org/presentationml/2006/main">
+  <p:cSld name="Slide 5">
+    <p:spTree>
+      <p:nvGrpSpPr>
+        <p:cNvPr id="1" name=""/>
+        <p:cNvGrpSpPr/>
+        <p:nvPr/>
+      </p:nvGrpSpPr>
+      <p:grpSpPr>
+        <a:xfrm>
+          <a:off x="0" y="0"/>
+          <a:ext cx="0" cy="0"/>
+          <a:chOff x="0" y="0"/>
+          <a:chExt cx="0" cy="0"/>
+        </a:xfrm>
+      </p:grpSpPr>
+      <p:sp>
+        <p:nvSpPr>
+          <p:cNvPr id="2" name="Text 0"/>
+          <p:cNvSpPr/>
+          <p:nvPr/>
+        </p:nvSpPr>
+        <p:spPr>
+          <a:xfrm>
+            <a:off x="457200" y="713232"/>
+            <a:ext cx="11368735" cy="274320"/>
+          </a:xfrm>
+          <a:prstGeom prst="rect">
+            <a:avLst/>
+          </a:prstGeom>
+          <a:noFill/>
+          <a:ln/>
+        </p:spPr>
+        <p:txBody>
+          <a:bodyPr wrap="square" lIns="0" tIns="0" rIns="0" bIns="0" rtlCol="0" anchor="ctr"/>
+          <a:lstStyle/>
+          <a:p>
+            <a:pPr algn="r" indent="0" marL="0">
+              <a:buNone/>
+            </a:pPr>
+            <a:r>
+              <a:rPr lang="en-US" sz="1400" b="1" dirty="0">
+                <a:solidFill>
+                  <a:srgbClr val="1C3F6E"/>
+                </a:solidFill>
+                <a:latin typeface="Calibri" pitchFamily="34" charset="0"/>
+                <a:ea typeface="Calibri" pitchFamily="34" charset="-122"/>
+                <a:cs typeface="Calibri" pitchFamily="34" charset="-120"/>
+              </a:rPr>
+              <a:t>HOMEWORK CORRECTION</a:t>
+            </a:r>
+            <a:endParaRPr lang="en-US" sz="1400" dirty="0"/>
+          </a:p>
+        </p:txBody>
+      </p:sp>
+      <p:pic>
+        <p:nvPicPr>
+          <p:cNvPr id="3" name="Image 0" descr="/home/claude/f4/img/minesec_sheet.png">    </p:cNvPr>
+          <p:cNvPicPr>
+            <a:picLocks noChangeAspect="1"/>
+          </p:cNvPicPr>
+          <p:nvPr/>
+        </p:nvPicPr>
+        <p:blipFill>
+          <a:blip r:embed="rId1"/>
+          <a:stretch>
+            <a:fillRect/>
+          </a:stretch>
+        </p:blipFill>
+        <p:spPr>
+          <a:xfrm>
+            <a:off x="0" y="658368"/>
+            <a:ext cx="5120640" cy="5833872"/>
+          </a:xfrm>
+          <a:prstGeom prst="rect">
+            <a:avLst/>
+          </a:prstGeom>
+        </p:spPr>
+      </p:pic>
+      <p:sp>
+        <p:nvSpPr>
+          <p:cNvPr id="4" name="Text 1"/>
+          <p:cNvSpPr/>
+          <p:nvPr/>
+        </p:nvSpPr>
+        <p:spPr>
+          <a:xfrm>
+            <a:off x="5349240" y="1005840"/>
+            <a:ext cx="6522415" cy="731520"/>
+          </a:xfrm>
+          <a:prstGeom prst="rect">
+            <a:avLst/>
+          </a:prstGeom>
+          <a:noFill/>
+          <a:ln/>
+        </p:spPr>
+        <p:txBody>
+          <a:bodyPr wrap="square" lIns="0" tIns="0" rIns="0" bIns="0" rtlCol="0" anchor="ctr">
+            <a:normAutofit/>
+          </a:bodyPr>
+          <a:lstStyle/>
+          <a:p>
+            <a:pPr algn="ctr" indent="0" marL="0">
+              <a:buNone/>
+            </a:pPr>
+            <a:r>
+              <a:rPr lang="en-US" sz="3600" b="1" dirty="0">
+                <a:solidFill>
+                  <a:srgbClr val="990011"/>
+                </a:solidFill>
+                <a:latin typeface="Times New Roman" pitchFamily="34" charset="0"/>
+                <a:ea typeface="Times New Roman" pitchFamily="34" charset="-122"/>
+                <a:cs typeface="Times New Roman" pitchFamily="34" charset="-120"/>
+              </a:rPr>
+              <a:t>Correction: Possible Answer</a:t>
+            </a:r>
+            <a:endParaRPr lang="en-US" sz="3600" dirty="0"/>
+          </a:p>
+        </p:txBody>
+      </p:sp>
+      <p:sp>
+        <p:nvSpPr>
+          <p:cNvPr id="5" name="Text 2"/>
+          <p:cNvSpPr/>
+          <p:nvPr/>
+        </p:nvSpPr>
+        <p:spPr>
+          <a:xfrm>
+            <a:off x="5349240" y="1783080"/>
+            <a:ext cx="6522415" cy="4663440"/>
+          </a:xfrm>
+          <a:prstGeom prst="rect">
+            <a:avLst/>
+          </a:prstGeom>
+          <a:noFill/>
+          <a:ln/>
+        </p:spPr>
+        <p:txBody>
+          <a:bodyPr wrap="square" lIns="0" tIns="0" rIns="0" bIns="0" rtlCol="0" anchor="t"/>
+          <a:lstStyle/>
+          <a:p>
+            <a:pPr algn="l" indent="0" marL="0">
+              <a:spcAft>
+                <a:spcPts val="800"/>
+              </a:spcAft>
+              <a:buNone/>
+            </a:pPr>
+            <a:r>
+              <a:rPr lang="en-US" sz="4000" dirty="0">
+                <a:solidFill>
+                  <a:srgbClr val="111111"/>
+                </a:solidFill>
+                <a:latin typeface="Times New Roman" pitchFamily="34" charset="0"/>
+                <a:ea typeface="Times New Roman" pitchFamily="34" charset="-122"/>
+                <a:cs typeface="Times New Roman" pitchFamily="34" charset="-120"/>
+              </a:rPr>
+              <a:t>Examples: France, Italy, Germany, the United Kingdom, the USA, Japan and China all lie between 30° and 60° N.</a:t>
+            </a:r>
+            <a:endParaRPr lang="en-US" sz="4000" dirty="0"/>
+          </a:p>
+        </p:txBody>
+      </p:sp>
+      <p:sp>
+        <p:nvSpPr>
+          <p:cNvPr id="25" name="Slide Number Placeholder 0"/>
+          <p:cNvSpPr>
+            <a:spLocks noGrp="1"/>
+          </p:cNvSpPr>
+          <p:nvPr>
+            <p:ph type="sldNum" sz="quarter" idx="4294967295"/>
+          </p:nvPr>
+        </p:nvSpPr>
+        <p:spPr>
+          <a:xfrm>
+            <a:off x="27432" y="91440"/>
+            <a:ext cx="585216" cy="475488"/>
+          </a:xfrm>
+          <a:prstGeom prst="rect">
+            <a:avLst/>
+          </a:prstGeom>
+          <a:extLst>
+            <a:ext uri="{C572A759-6A51-4108-AA02-DFA0A04FC94B}">
+              <ma14:wrappingTextBoxFlag xmlns:ma14="http://schemas.microsoft.com/office/mac/drawingml/2011/main" val="0"/>
+            </a:ext>
+          </a:extLst>
+        </p:spPr>
+        <p:txBody>
+          <a:bodyPr/>
+          <a:lstStyle>
+            <a:lvl1pPr>
+              <a:defRPr sz="2000">
+                <a:solidFill>
+                  <a:srgbClr val="FFFFFF"/>
+                </a:solidFill>
+                <a:latin typeface="Calibri"/>
+                <a:ea typeface="Calibri"/>
+                <a:cs typeface="Calibri"/>
+              </a:defRPr>
+            </a:lvl1pPr>
+          </a:lstStyle>
+          <a:p>
+            <a:pPr algn="ctr"/>
+            <a:fld id="{F7021451-1387-4CA6-816F-3879F97B5CBC}" type="slidenum">
+              <a:rPr b="1" lang="en-US"/>
+              <a:t>5</a:t>
+            </a:fld>
+            <a:endParaRPr lang="en-US"/>
+          </a:p>
+        </p:txBody>
+      </p:sp>
+    </p:spTree>
+  </p:cSld>
+  <p:clrMapOvr>
+    <a:masterClrMapping/>
+  </p:clrMapOvr>
+</p:sld>
+</file>
+
+<file path=ppt/slides/slide50.xml><?xml version="1.0" encoding="utf-8"?>
+<p:sld xmlns:a="http://schemas.openxmlformats.org/drawingml/2006/main" xmlns:r="http://schemas.openxmlformats.org/officeDocument/2006/relationships" xmlns:p="http://schemas.openxmlformats.org/presentationml/2006/main">
+  <p:cSld name="Slide 50">
+    <p:spTree>
+      <p:nvGrpSpPr>
+        <p:cNvPr id="1" name=""/>
+        <p:cNvGrpSpPr/>
+        <p:nvPr/>
+      </p:nvGrpSpPr>
+      <p:grpSpPr>
+        <a:xfrm>
+          <a:off x="0" y="0"/>
+          <a:ext cx="0" cy="0"/>
+          <a:chOff x="0" y="0"/>
+          <a:chExt cx="0" cy="0"/>
+        </a:xfrm>
+      </p:grpSpPr>
+      <p:sp>
+        <p:nvSpPr>
+          <p:cNvPr id="2" name="Text 0"/>
+          <p:cNvSpPr/>
+          <p:nvPr/>
+        </p:nvSpPr>
+        <p:spPr>
+          <a:xfrm>
+            <a:off x="457200" y="713232"/>
+            <a:ext cx="11368735" cy="274320"/>
+          </a:xfrm>
+          <a:prstGeom prst="rect">
+            <a:avLst/>
+          </a:prstGeom>
+          <a:noFill/>
+          <a:ln/>
+        </p:spPr>
+        <p:txBody>
+          <a:bodyPr wrap="square" lIns="0" tIns="0" rIns="0" bIns="0" rtlCol="0" anchor="ctr"/>
+          <a:lstStyle/>
+          <a:p>
+            <a:pPr algn="r" indent="0" marL="0">
+              <a:buNone/>
+            </a:pPr>
+            <a:r>
+              <a:rPr lang="en-US" sz="1400" b="1" dirty="0">
+                <a:solidFill>
+                  <a:srgbClr val="1C3F6E"/>
+                </a:solidFill>
+                <a:latin typeface="Calibri" pitchFamily="34" charset="0"/>
+                <a:ea typeface="Calibri" pitchFamily="34" charset="-122"/>
+                <a:cs typeface="Calibri" pitchFamily="34" charset="-120"/>
+              </a:rPr>
               <a:t>BILINGUAL GAME</a:t>
             </a:r>
             <a:endParaRPr lang="en-US" sz="1400" dirty="0"/>
@@ -17458,7 +18012,7 @@
       </p:sp>
       <p:graphicFrame>
         <p:nvGraphicFramePr>
-          <p:cNvPr id="50" name="Table 0"/>
+          <p:cNvPr id="51" name="Table 0"/>
           <p:cNvGraphicFramePr>
             <a:graphicFrameLocks noGrp="1"/>
           </p:cNvGraphicFramePr>
@@ -18770,7 +19324,7 @@
             <a:pPr algn="ctr"/>
             <a:fld id="{F7021451-1387-4CA6-816F-3879F97B5CBC}" type="slidenum">
               <a:rPr b="1" lang="en-US"/>
-              <a:t>49</a:t>
+              <a:t>50</a:t>
             </a:fld>
             <a:endParaRPr lang="en-US"/>
           </a:p>
@@ -18784,9 +19338,9 @@
 </p:sld>
 </file>
 
-<file path=ppt/slides/slide5.xml><?xml version="1.0" encoding="utf-8"?>
+<file path=ppt/slides/slide51.xml><?xml version="1.0" encoding="utf-8"?>
 <p:sld xmlns:a="http://schemas.openxmlformats.org/drawingml/2006/main" xmlns:r="http://schemas.openxmlformats.org/officeDocument/2006/relationships" xmlns:p="http://schemas.openxmlformats.org/presentationml/2006/main">
-  <p:cSld name="Slide 5">
+  <p:cSld name="Slide 51">
     <p:spTree>
       <p:nvGrpSpPr>
         <p:cNvPr id="1" name=""/>
@@ -18834,225 +19388,6 @@
                 <a:ea typeface="Calibri" pitchFamily="34" charset="-122"/>
                 <a:cs typeface="Calibri" pitchFamily="34" charset="-120"/>
               </a:rPr>
-              <a:t>HOMEWORK CORRECTION</a:t>
-            </a:r>
-            <a:endParaRPr lang="en-US" sz="1400" dirty="0"/>
-          </a:p>
-        </p:txBody>
-      </p:sp>
-      <p:pic>
-        <p:nvPicPr>
-          <p:cNvPr id="3" name="Image 0" descr="/home/claude/f4/img/minesec_sheet.png">    </p:cNvPr>
-          <p:cNvPicPr>
-            <a:picLocks noChangeAspect="1"/>
-          </p:cNvPicPr>
-          <p:nvPr/>
-        </p:nvPicPr>
-        <p:blipFill>
-          <a:blip r:embed="rId1"/>
-          <a:stretch>
-            <a:fillRect/>
-          </a:stretch>
-        </p:blipFill>
-        <p:spPr>
-          <a:xfrm>
-            <a:off x="0" y="658368"/>
-            <a:ext cx="5120640" cy="5833872"/>
-          </a:xfrm>
-          <a:prstGeom prst="rect">
-            <a:avLst/>
-          </a:prstGeom>
-        </p:spPr>
-      </p:pic>
-      <p:sp>
-        <p:nvSpPr>
-          <p:cNvPr id="4" name="Text 1"/>
-          <p:cNvSpPr/>
-          <p:nvPr/>
-        </p:nvSpPr>
-        <p:spPr>
-          <a:xfrm>
-            <a:off x="5349240" y="1005840"/>
-            <a:ext cx="6522415" cy="731520"/>
-          </a:xfrm>
-          <a:prstGeom prst="rect">
-            <a:avLst/>
-          </a:prstGeom>
-          <a:noFill/>
-          <a:ln/>
-        </p:spPr>
-        <p:txBody>
-          <a:bodyPr wrap="square" lIns="0" tIns="0" rIns="0" bIns="0" rtlCol="0" anchor="ctr">
-            <a:normAutofit/>
-          </a:bodyPr>
-          <a:lstStyle/>
-          <a:p>
-            <a:pPr algn="ctr" indent="0" marL="0">
-              <a:buNone/>
-            </a:pPr>
-            <a:r>
-              <a:rPr lang="en-US" sz="3600" b="1" dirty="0">
-                <a:solidFill>
-                  <a:srgbClr val="990011"/>
-                </a:solidFill>
-                <a:latin typeface="Times New Roman" pitchFamily="34" charset="0"/>
-                <a:ea typeface="Times New Roman" pitchFamily="34" charset="-122"/>
-                <a:cs typeface="Times New Roman" pitchFamily="34" charset="-120"/>
-              </a:rPr>
-              <a:t>Correction: Possible Answer</a:t>
-            </a:r>
-            <a:endParaRPr lang="en-US" sz="3600" dirty="0"/>
-          </a:p>
-        </p:txBody>
-      </p:sp>
-      <p:sp>
-        <p:nvSpPr>
-          <p:cNvPr id="5" name="Text 2"/>
-          <p:cNvSpPr/>
-          <p:nvPr/>
-        </p:nvSpPr>
-        <p:spPr>
-          <a:xfrm>
-            <a:off x="5349240" y="1783080"/>
-            <a:ext cx="6522415" cy="4663440"/>
-          </a:xfrm>
-          <a:prstGeom prst="rect">
-            <a:avLst/>
-          </a:prstGeom>
-          <a:noFill/>
-          <a:ln/>
-        </p:spPr>
-        <p:txBody>
-          <a:bodyPr wrap="square" lIns="0" tIns="0" rIns="0" bIns="0" rtlCol="0" anchor="t"/>
-          <a:lstStyle/>
-          <a:p>
-            <a:pPr algn="l" indent="0" marL="0">
-              <a:spcAft>
-                <a:spcPts val="800"/>
-              </a:spcAft>
-              <a:buNone/>
-            </a:pPr>
-            <a:r>
-              <a:rPr lang="en-US" sz="4000" dirty="0">
-                <a:solidFill>
-                  <a:srgbClr val="111111"/>
-                </a:solidFill>
-                <a:latin typeface="Times New Roman" pitchFamily="34" charset="0"/>
-                <a:ea typeface="Times New Roman" pitchFamily="34" charset="-122"/>
-                <a:cs typeface="Times New Roman" pitchFamily="34" charset="-120"/>
-              </a:rPr>
-              <a:t>Examples: France, Italy, Germany, the United Kingdom, the USA, Japan and China all lie between 30° and 60° N.</a:t>
-            </a:r>
-            <a:endParaRPr lang="en-US" sz="4000" dirty="0"/>
-          </a:p>
-        </p:txBody>
-      </p:sp>
-      <p:sp>
-        <p:nvSpPr>
-          <p:cNvPr id="25" name="Slide Number Placeholder 0"/>
-          <p:cNvSpPr>
-            <a:spLocks noGrp="1"/>
-          </p:cNvSpPr>
-          <p:nvPr>
-            <p:ph type="sldNum" sz="quarter" idx="4294967295"/>
-          </p:nvPr>
-        </p:nvSpPr>
-        <p:spPr>
-          <a:xfrm>
-            <a:off x="27432" y="91440"/>
-            <a:ext cx="585216" cy="475488"/>
-          </a:xfrm>
-          <a:prstGeom prst="rect">
-            <a:avLst/>
-          </a:prstGeom>
-          <a:extLst>
-            <a:ext uri="{C572A759-6A51-4108-AA02-DFA0A04FC94B}">
-              <ma14:wrappingTextBoxFlag xmlns:ma14="http://schemas.microsoft.com/office/mac/drawingml/2011/main" val="0"/>
-            </a:ext>
-          </a:extLst>
-        </p:spPr>
-        <p:txBody>
-          <a:bodyPr/>
-          <a:lstStyle>
-            <a:lvl1pPr>
-              <a:defRPr sz="2000">
-                <a:solidFill>
-                  <a:srgbClr val="FFFFFF"/>
-                </a:solidFill>
-                <a:latin typeface="Calibri"/>
-                <a:ea typeface="Calibri"/>
-                <a:cs typeface="Calibri"/>
-              </a:defRPr>
-            </a:lvl1pPr>
-          </a:lstStyle>
-          <a:p>
-            <a:pPr algn="ctr"/>
-            <a:fld id="{F7021451-1387-4CA6-816F-3879F97B5CBC}" type="slidenum">
-              <a:rPr b="1" lang="en-US"/>
-              <a:t>5</a:t>
-            </a:fld>
-            <a:endParaRPr lang="en-US"/>
-          </a:p>
-        </p:txBody>
-      </p:sp>
-    </p:spTree>
-  </p:cSld>
-  <p:clrMapOvr>
-    <a:masterClrMapping/>
-  </p:clrMapOvr>
-</p:sld>
-</file>
-
-<file path=ppt/slides/slide50.xml><?xml version="1.0" encoding="utf-8"?>
-<p:sld xmlns:a="http://schemas.openxmlformats.org/drawingml/2006/main" xmlns:r="http://schemas.openxmlformats.org/officeDocument/2006/relationships" xmlns:p="http://schemas.openxmlformats.org/presentationml/2006/main">
-  <p:cSld name="Slide 50">
-    <p:spTree>
-      <p:nvGrpSpPr>
-        <p:cNvPr id="1" name=""/>
-        <p:cNvGrpSpPr/>
-        <p:nvPr/>
-      </p:nvGrpSpPr>
-      <p:grpSpPr>
-        <a:xfrm>
-          <a:off x="0" y="0"/>
-          <a:ext cx="0" cy="0"/>
-          <a:chOff x="0" y="0"/>
-          <a:chExt cx="0" cy="0"/>
-        </a:xfrm>
-      </p:grpSpPr>
-      <p:sp>
-        <p:nvSpPr>
-          <p:cNvPr id="2" name="Text 0"/>
-          <p:cNvSpPr/>
-          <p:nvPr/>
-        </p:nvSpPr>
-        <p:spPr>
-          <a:xfrm>
-            <a:off x="457200" y="713232"/>
-            <a:ext cx="11368735" cy="274320"/>
-          </a:xfrm>
-          <a:prstGeom prst="rect">
-            <a:avLst/>
-          </a:prstGeom>
-          <a:noFill/>
-          <a:ln/>
-        </p:spPr>
-        <p:txBody>
-          <a:bodyPr wrap="square" lIns="0" tIns="0" rIns="0" bIns="0" rtlCol="0" anchor="ctr"/>
-          <a:lstStyle/>
-          <a:p>
-            <a:pPr algn="r" indent="0" marL="0">
-              <a:buNone/>
-            </a:pPr>
-            <a:r>
-              <a:rPr lang="en-US" sz="1400" b="1" dirty="0">
-                <a:solidFill>
-                  <a:srgbClr val="1C3F6E"/>
-                </a:solidFill>
-                <a:latin typeface="Calibri" pitchFamily="34" charset="0"/>
-                <a:ea typeface="Calibri" pitchFamily="34" charset="-122"/>
-                <a:cs typeface="Calibri" pitchFamily="34" charset="-120"/>
-              </a:rPr>
               <a:t>LOGBOOK</a:t>
             </a:r>
             <a:endParaRPr lang="en-US" sz="1400" dirty="0"/>
@@ -19100,7 +19435,7 @@
       </p:sp>
       <p:graphicFrame>
         <p:nvGraphicFramePr>
-          <p:cNvPr id="51" name="Table 0"/>
+          <p:cNvPr id="52" name="Table 0"/>
           <p:cNvGraphicFramePr>
             <a:graphicFrameLocks noGrp="1"/>
           </p:cNvGraphicFramePr>
@@ -19722,7 +20057,7 @@
             <a:pPr algn="ctr"/>
             <a:fld id="{F7021451-1387-4CA6-816F-3879F97B5CBC}" type="slidenum">
               <a:rPr b="1" lang="en-US"/>
-              <a:t>50</a:t>
+              <a:t>51</a:t>
             </a:fld>
             <a:endParaRPr lang="en-US"/>
           </a:p>
@@ -19736,9 +20071,9 @@
 </p:sld>
 </file>
 
-<file path=ppt/slides/slide51.xml><?xml version="1.0" encoding="utf-8"?>
+<file path=ppt/slides/slide52.xml><?xml version="1.0" encoding="utf-8"?>
 <p:sld xmlns:a="http://schemas.openxmlformats.org/drawingml/2006/main" xmlns:r="http://schemas.openxmlformats.org/officeDocument/2006/relationships" xmlns:p="http://schemas.openxmlformats.org/presentationml/2006/main">
-  <p:cSld name="Slide 51">
+  <p:cSld name="Slide 52">
     <p:spTree>
       <p:nvGrpSpPr>
         <p:cNvPr id="1" name=""/>
@@ -19833,7 +20168,7 @@
       </p:sp>
       <p:graphicFrame>
         <p:nvGraphicFramePr>
-          <p:cNvPr id="52" name="Table 0"/>
+          <p:cNvPr id="53" name="Table 0"/>
           <p:cNvGraphicFramePr>
             <a:graphicFrameLocks noGrp="1"/>
           </p:cNvGraphicFramePr>
@@ -19943,7 +20278,7 @@
                           <a:ea typeface="Calibri" pitchFamily="34" charset="-122"/>
                           <a:cs typeface="Calibri" pitchFamily="34" charset="-120"/>
                         </a:rPr>
-                        <a:t>Meaning; Location; Types of Climate.</a:t>
+                        <a:t>DEFINITIONS; Location; Types; Characteristics of the Climate.</a:t>
                       </a:r>
                       <a:endParaRPr lang="en-US" sz="1600" dirty="0">
                         <a:latin typeface="Calibri" charset="0"/>
@@ -20593,331 +20928,6 @@
             <a:pPr algn="ctr"/>
             <a:fld id="{F7021451-1387-4CA6-816F-3879F97B5CBC}" type="slidenum">
               <a:rPr b="1" lang="en-US"/>
-              <a:t>51</a:t>
-            </a:fld>
-            <a:endParaRPr lang="en-US"/>
-          </a:p>
-        </p:txBody>
-      </p:sp>
-    </p:spTree>
-  </p:cSld>
-  <p:clrMapOvr>
-    <a:masterClrMapping/>
-  </p:clrMapOvr>
-</p:sld>
-</file>
-
-<file path=ppt/slides/slide52.xml><?xml version="1.0" encoding="utf-8"?>
-<p:sld xmlns:a="http://schemas.openxmlformats.org/drawingml/2006/main" xmlns:r="http://schemas.openxmlformats.org/officeDocument/2006/relationships" xmlns:p="http://schemas.openxmlformats.org/presentationml/2006/main">
-  <p:cSld name="Slide 52">
-    <p:spTree>
-      <p:nvGrpSpPr>
-        <p:cNvPr id="1" name=""/>
-        <p:cNvGrpSpPr/>
-        <p:nvPr/>
-      </p:nvGrpSpPr>
-      <p:grpSpPr>
-        <a:xfrm>
-          <a:off x="0" y="0"/>
-          <a:ext cx="0" cy="0"/>
-          <a:chOff x="0" y="0"/>
-          <a:chExt cx="0" cy="0"/>
-        </a:xfrm>
-      </p:grpSpPr>
-      <p:sp>
-        <p:nvSpPr>
-          <p:cNvPr id="2" name="Text 0"/>
-          <p:cNvSpPr/>
-          <p:nvPr/>
-        </p:nvSpPr>
-        <p:spPr>
-          <a:xfrm>
-            <a:off x="457200" y="713232"/>
-            <a:ext cx="11368735" cy="274320"/>
-          </a:xfrm>
-          <a:prstGeom prst="rect">
-            <a:avLst/>
-          </a:prstGeom>
-          <a:noFill/>
-          <a:ln/>
-        </p:spPr>
-        <p:txBody>
-          <a:bodyPr wrap="square" lIns="0" tIns="0" rIns="0" bIns="0" rtlCol="0" anchor="ctr"/>
-          <a:lstStyle/>
-          <a:p>
-            <a:pPr algn="r" indent="0" marL="0">
-              <a:buNone/>
-            </a:pPr>
-            <a:r>
-              <a:rPr lang="en-US" sz="1400" b="1" dirty="0">
-                <a:solidFill>
-                  <a:srgbClr val="1C3F6E"/>
-                </a:solidFill>
-                <a:latin typeface="Calibri" pitchFamily="34" charset="0"/>
-                <a:ea typeface="Calibri" pitchFamily="34" charset="-122"/>
-                <a:cs typeface="Calibri" pitchFamily="34" charset="-120"/>
-              </a:rPr>
-              <a:t>TEACHER'S NOTE</a:t>
-            </a:r>
-            <a:endParaRPr lang="en-US" sz="1400" dirty="0"/>
-          </a:p>
-        </p:txBody>
-      </p:sp>
-      <p:pic>
-        <p:nvPicPr>
-          <p:cNvPr id="3" name="Image 0" descr="/home/claude/f4/img/minesec_sheet.png">    </p:cNvPr>
-          <p:cNvPicPr>
-            <a:picLocks noChangeAspect="1"/>
-          </p:cNvPicPr>
-          <p:nvPr/>
-        </p:nvPicPr>
-        <p:blipFill>
-          <a:blip r:embed="rId1"/>
-          <a:stretch>
-            <a:fillRect/>
-          </a:stretch>
-        </p:blipFill>
-        <p:spPr>
-          <a:xfrm>
-            <a:off x="0" y="658368"/>
-            <a:ext cx="2468880" cy="5833872"/>
-          </a:xfrm>
-          <a:prstGeom prst="rect">
-            <a:avLst/>
-          </a:prstGeom>
-        </p:spPr>
-      </p:pic>
-      <p:sp>
-        <p:nvSpPr>
-          <p:cNvPr id="4" name="Text 1"/>
-          <p:cNvSpPr/>
-          <p:nvPr/>
-        </p:nvSpPr>
-        <p:spPr>
-          <a:xfrm>
-            <a:off x="2697480" y="1005840"/>
-            <a:ext cx="9174175" cy="731520"/>
-          </a:xfrm>
-          <a:prstGeom prst="rect">
-            <a:avLst/>
-          </a:prstGeom>
-          <a:noFill/>
-          <a:ln/>
-        </p:spPr>
-        <p:txBody>
-          <a:bodyPr wrap="square" lIns="0" tIns="0" rIns="0" bIns="0" rtlCol="0" anchor="ctr">
-            <a:normAutofit/>
-          </a:bodyPr>
-          <a:lstStyle/>
-          <a:p>
-            <a:pPr algn="ctr" indent="0" marL="0">
-              <a:buNone/>
-            </a:pPr>
-            <a:r>
-              <a:rPr lang="en-US" sz="3600" b="1" dirty="0">
-                <a:solidFill>
-                  <a:srgbClr val="990011"/>
-                </a:solidFill>
-                <a:latin typeface="Times New Roman" pitchFamily="34" charset="0"/>
-                <a:ea typeface="Times New Roman" pitchFamily="34" charset="-122"/>
-                <a:cs typeface="Times New Roman" pitchFamily="34" charset="-120"/>
-              </a:rPr>
-              <a:t>Teacher's Note</a:t>
-            </a:r>
-            <a:endParaRPr lang="en-US" sz="3600" dirty="0"/>
-          </a:p>
-        </p:txBody>
-      </p:sp>
-      <p:sp>
-        <p:nvSpPr>
-          <p:cNvPr id="5" name="Text 2"/>
-          <p:cNvSpPr/>
-          <p:nvPr/>
-        </p:nvSpPr>
-        <p:spPr>
-          <a:xfrm>
-            <a:off x="2697480" y="1783080"/>
-            <a:ext cx="9174175" cy="4663440"/>
-          </a:xfrm>
-          <a:prstGeom prst="rect">
-            <a:avLst/>
-          </a:prstGeom>
-          <a:noFill/>
-          <a:ln/>
-        </p:spPr>
-        <p:txBody>
-          <a:bodyPr wrap="square" lIns="0" tIns="0" rIns="0" bIns="0" rtlCol="0" anchor="t"/>
-          <a:lstStyle/>
-          <a:p>
-            <a:pPr algn="l" marL="342900" indent="-342900">
-              <a:spcAft>
-                <a:spcPts val="800"/>
-              </a:spcAft>
-              <a:buSzPct val="100000"/>
-              <a:buChar char="•"/>
-            </a:pPr>
-            <a:r>
-              <a:rPr lang="en-US" sz="2000" dirty="0">
-                <a:solidFill>
-                  <a:srgbClr val="111111"/>
-                </a:solidFill>
-                <a:latin typeface="Calibri" pitchFamily="34" charset="0"/>
-                <a:ea typeface="Calibri" pitchFamily="34" charset="-122"/>
-                <a:cs typeface="Calibri" pitchFamily="34" charset="-120"/>
-              </a:rPr>
-              <a:t>Timing: Homework correction, plan, objectives 8 min | Recall, situation, action 10 min | 5 activities 30 min | Board summary (copying) 30 min | Evaluation, remediation 10 min | Homework, next lesson 5 min | Logbook 7 min</a:t>
-            </a:r>
-            <a:endParaRPr lang="en-US" sz="2000" dirty="0"/>
-          </a:p>
-          <a:p>
-            <a:pPr algn="l" marL="342900" indent="-342900">
-              <a:spcAft>
-                <a:spcPts val="800"/>
-              </a:spcAft>
-              <a:buSzPct val="100000"/>
-              <a:buChar char="•"/>
-            </a:pPr>
-            <a:r>
-              <a:rPr lang="en-US" sz="2000" dirty="0">
-                <a:solidFill>
-                  <a:srgbClr val="111111"/>
-                </a:solidFill>
-                <a:latin typeface="Calibri" pitchFamily="34" charset="0"/>
-                <a:ea typeface="Calibri" pitchFamily="34" charset="-122"/>
-                <a:cs typeface="Calibri" pitchFamily="34" charset="-120"/>
-              </a:rPr>
-              <a:t>London data (approximate normals): January 5 °C, July 19 °C, about 600 mm of rain spread over the year.</a:t>
-            </a:r>
-            <a:endParaRPr lang="en-US" sz="2000" dirty="0"/>
-          </a:p>
-          <a:p>
-            <a:pPr algn="l" marL="342900" indent="-342900">
-              <a:spcAft>
-                <a:spcPts val="800"/>
-              </a:spcAft>
-              <a:buSzPct val="100000"/>
-              <a:buChar char="•"/>
-            </a:pPr>
-            <a:r>
-              <a:rPr lang="en-US" sz="2000" dirty="0">
-                <a:solidFill>
-                  <a:srgbClr val="111111"/>
-                </a:solidFill>
-                <a:latin typeface="Calibri" pitchFamily="34" charset="0"/>
-                <a:ea typeface="Calibri" pitchFamily="34" charset="-122"/>
-                <a:cs typeface="Calibri" pitchFamily="34" charset="-120"/>
-              </a:rPr>
-              <a:t>Without the projector (Activity 1): draw the Equator and the lines 30° and 60° on the board.</a:t>
-            </a:r>
-            <a:endParaRPr lang="en-US" sz="2000" dirty="0"/>
-          </a:p>
-          <a:p>
-            <a:pPr algn="l" marL="342900" indent="-342900">
-              <a:spcAft>
-                <a:spcPts val="800"/>
-              </a:spcAft>
-              <a:buSzPct val="100000"/>
-              <a:buChar char="•"/>
-            </a:pPr>
-            <a:r>
-              <a:rPr lang="en-US" sz="2000" dirty="0">
-                <a:solidFill>
-                  <a:srgbClr val="111111"/>
-                </a:solidFill>
-                <a:latin typeface="Calibri" pitchFamily="34" charset="0"/>
-                <a:ea typeface="Calibri" pitchFamily="34" charset="-122"/>
-                <a:cs typeface="Calibri" pitchFamily="34" charset="-120"/>
-              </a:rPr>
-              <a:t>Without the projector (Activity 2): write the four seasons on the board with one word for each.</a:t>
-            </a:r>
-            <a:endParaRPr lang="en-US" sz="2000" dirty="0"/>
-          </a:p>
-          <a:p>
-            <a:pPr algn="l" marL="342900" indent="-342900">
-              <a:spcAft>
-                <a:spcPts val="800"/>
-              </a:spcAft>
-              <a:buSzPct val="100000"/>
-              <a:buChar char="•"/>
-            </a:pPr>
-            <a:r>
-              <a:rPr lang="en-US" sz="2000" dirty="0">
-                <a:solidFill>
-                  <a:srgbClr val="111111"/>
-                </a:solidFill>
-                <a:latin typeface="Calibri" pitchFamily="34" charset="0"/>
-                <a:ea typeface="Calibri" pitchFamily="34" charset="-122"/>
-                <a:cs typeface="Calibri" pitchFamily="34" charset="-120"/>
-              </a:rPr>
-              <a:t>Without the projector (Activity 3): describe snow: frozen rain that is white and very cold.</a:t>
-            </a:r>
-            <a:endParaRPr lang="en-US" sz="2000" dirty="0"/>
-          </a:p>
-          <a:p>
-            <a:pPr algn="l" marL="342900" indent="-342900">
-              <a:spcAft>
-                <a:spcPts val="800"/>
-              </a:spcAft>
-              <a:buSzPct val="100000"/>
-              <a:buChar char="•"/>
-            </a:pPr>
-            <a:r>
-              <a:rPr lang="en-US" sz="2000" dirty="0">
-                <a:solidFill>
-                  <a:srgbClr val="111111"/>
-                </a:solidFill>
-                <a:latin typeface="Calibri" pitchFamily="34" charset="0"/>
-                <a:ea typeface="Calibri" pitchFamily="34" charset="-122"/>
-                <a:cs typeface="Calibri" pitchFamily="34" charset="-120"/>
-              </a:rPr>
-              <a:t>Without the projector (Activity 4): write the temperature of London in January and July on the board.</a:t>
-            </a:r>
-            <a:endParaRPr lang="en-US" sz="2000" dirty="0"/>
-          </a:p>
-        </p:txBody>
-      </p:sp>
-      <p:sp>
-        <p:nvSpPr>
-          <p:cNvPr id="25" name="Slide Number Placeholder 0"/>
-          <p:cNvSpPr>
-            <a:spLocks noGrp="1"/>
-          </p:cNvSpPr>
-          <p:nvPr>
-            <p:ph type="sldNum" sz="quarter" idx="4294967295"/>
-          </p:nvPr>
-        </p:nvSpPr>
-        <p:spPr>
-          <a:xfrm>
-            <a:off x="27432" y="91440"/>
-            <a:ext cx="585216" cy="475488"/>
-          </a:xfrm>
-          <a:prstGeom prst="rect">
-            <a:avLst/>
-          </a:prstGeom>
-          <a:extLst>
-            <a:ext uri="{C572A759-6A51-4108-AA02-DFA0A04FC94B}">
-              <ma14:wrappingTextBoxFlag xmlns:ma14="http://schemas.microsoft.com/office/mac/drawingml/2011/main" val="0"/>
-            </a:ext>
-          </a:extLst>
-        </p:spPr>
-        <p:txBody>
-          <a:bodyPr/>
-          <a:lstStyle>
-            <a:lvl1pPr>
-              <a:defRPr sz="2000">
-                <a:solidFill>
-                  <a:srgbClr val="FFFFFF"/>
-                </a:solidFill>
-                <a:latin typeface="Calibri"/>
-                <a:ea typeface="Calibri"/>
-                <a:cs typeface="Calibri"/>
-              </a:defRPr>
-            </a:lvl1pPr>
-          </a:lstStyle>
-          <a:p>
-            <a:pPr algn="ctr"/>
-            <a:fld id="{F7021451-1387-4CA6-816F-3879F97B5CBC}" type="slidenum">
-              <a:rPr b="1" lang="en-US"/>
               <a:t>52</a:t>
             </a:fld>
             <a:endParaRPr lang="en-US"/>
@@ -21005,7 +21015,7 @@
         <p:spPr>
           <a:xfrm>
             <a:off x="0" y="658368"/>
-            <a:ext cx="5120640" cy="5833872"/>
+            <a:ext cx="3840480" cy="5833872"/>
           </a:xfrm>
           <a:prstGeom prst="rect">
             <a:avLst/>
@@ -21020,8 +21030,8 @@
         </p:nvSpPr>
         <p:spPr>
           <a:xfrm>
-            <a:off x="5349240" y="1005840"/>
-            <a:ext cx="6522415" cy="731520"/>
+            <a:off x="4069080" y="1005840"/>
+            <a:ext cx="7802575" cy="731520"/>
           </a:xfrm>
           <a:prstGeom prst="rect">
             <a:avLst/>
@@ -21047,7 +21057,7 @@
                 <a:ea typeface="Times New Roman" pitchFamily="34" charset="-122"/>
                 <a:cs typeface="Times New Roman" pitchFamily="34" charset="-120"/>
               </a:rPr>
-              <a:t>Teacher's Note (continued)</a:t>
+              <a:t>Teacher's Note</a:t>
             </a:r>
             <a:endParaRPr lang="en-US" sz="3600" dirty="0"/>
           </a:p>
@@ -21061,8 +21071,8 @@
         </p:nvSpPr>
         <p:spPr>
           <a:xfrm>
-            <a:off x="5349240" y="1783080"/>
-            <a:ext cx="6522415" cy="4663440"/>
+            <a:off x="4069080" y="1783080"/>
+            <a:ext cx="7802575" cy="4663440"/>
           </a:xfrm>
           <a:prstGeom prst="rect">
             <a:avLst/>
@@ -21090,7 +21100,133 @@
                 <a:ea typeface="Calibri" pitchFamily="34" charset="-122"/>
                 <a:cs typeface="Calibri" pitchFamily="34" charset="-120"/>
               </a:rPr>
-              <a:t>Without the projector (Activity 5): name countries around the Mediterranean Sea: Spain, Italy, Greece.</a:t>
+              <a:t>Timing: Homework correction, plan, objectives 8 min | Recall, situation, action 10 min | 5 activities 30 min | Board summary (copying) 30 min | Evaluation, remediation 10 min | Homework, next lesson 5 min | Logbook 7 min</a:t>
+            </a:r>
+            <a:endParaRPr lang="en-US" sz="2000" dirty="0"/>
+          </a:p>
+          <a:p>
+            <a:pPr algn="l" marL="342900" indent="-342900">
+              <a:spcAft>
+                <a:spcPts val="800"/>
+              </a:spcAft>
+              <a:buSzPct val="100000"/>
+              <a:buChar char="•"/>
+            </a:pPr>
+            <a:r>
+              <a:rPr lang="en-US" sz="2000" dirty="0">
+                <a:solidFill>
+                  <a:srgbClr val="111111"/>
+                </a:solidFill>
+                <a:latin typeface="Calibri" pitchFamily="34" charset="0"/>
+                <a:ea typeface="Calibri" pitchFamily="34" charset="-122"/>
+                <a:cs typeface="Calibri" pitchFamily="34" charset="-120"/>
+              </a:rPr>
+              <a:t>London data (approximate normals): January 5 °C, July 19 °C, about 600 mm of rain spread over the year.</a:t>
+            </a:r>
+            <a:endParaRPr lang="en-US" sz="2000" dirty="0"/>
+          </a:p>
+          <a:p>
+            <a:pPr algn="l" marL="342900" indent="-342900">
+              <a:spcAft>
+                <a:spcPts val="800"/>
+              </a:spcAft>
+              <a:buSzPct val="100000"/>
+              <a:buChar char="•"/>
+            </a:pPr>
+            <a:r>
+              <a:rPr lang="en-US" sz="2000" dirty="0">
+                <a:solidFill>
+                  <a:srgbClr val="111111"/>
+                </a:solidFill>
+                <a:latin typeface="Calibri" pitchFamily="34" charset="0"/>
+                <a:ea typeface="Calibri" pitchFamily="34" charset="-122"/>
+                <a:cs typeface="Calibri" pitchFamily="34" charset="-120"/>
+              </a:rPr>
+              <a:t>Without the projector (Activity 1): draw the lines on the board.</a:t>
+            </a:r>
+            <a:endParaRPr lang="en-US" sz="2000" dirty="0"/>
+          </a:p>
+          <a:p>
+            <a:pPr algn="l" marL="342900" indent="-342900">
+              <a:spcAft>
+                <a:spcPts val="800"/>
+              </a:spcAft>
+              <a:buSzPct val="100000"/>
+              <a:buChar char="•"/>
+            </a:pPr>
+            <a:r>
+              <a:rPr lang="en-US" sz="2000" dirty="0">
+                <a:solidFill>
+                  <a:srgbClr val="111111"/>
+                </a:solidFill>
+                <a:latin typeface="Calibri" pitchFamily="34" charset="0"/>
+                <a:ea typeface="Calibri" pitchFamily="34" charset="-122"/>
+                <a:cs typeface="Calibri" pitchFamily="34" charset="-120"/>
+              </a:rPr>
+              <a:t>Without the projector (Activity 2): write London's rainfall.</a:t>
+            </a:r>
+            <a:endParaRPr lang="en-US" sz="2000" dirty="0"/>
+          </a:p>
+          <a:p>
+            <a:pPr algn="l" marL="342900" indent="-342900">
+              <a:spcAft>
+                <a:spcPts val="800"/>
+              </a:spcAft>
+              <a:buSzPct val="100000"/>
+              <a:buChar char="•"/>
+            </a:pPr>
+            <a:r>
+              <a:rPr lang="en-US" sz="2000" dirty="0">
+                <a:solidFill>
+                  <a:srgbClr val="111111"/>
+                </a:solidFill>
+                <a:latin typeface="Calibri" pitchFamily="34" charset="0"/>
+                <a:ea typeface="Calibri" pitchFamily="34" charset="-122"/>
+                <a:cs typeface="Calibri" pitchFamily="34" charset="-120"/>
+              </a:rPr>
+              <a:t>Without the projector (Activity 3): name Mediterranean countries.</a:t>
+            </a:r>
+            <a:endParaRPr lang="en-US" sz="2000" dirty="0"/>
+          </a:p>
+          <a:p>
+            <a:pPr algn="l" marL="342900" indent="-342900">
+              <a:spcAft>
+                <a:spcPts val="800"/>
+              </a:spcAft>
+              <a:buSzPct val="100000"/>
+              <a:buChar char="•"/>
+            </a:pPr>
+            <a:r>
+              <a:rPr lang="en-US" sz="2000" dirty="0">
+                <a:solidFill>
+                  <a:srgbClr val="111111"/>
+                </a:solidFill>
+                <a:latin typeface="Calibri" pitchFamily="34" charset="0"/>
+                <a:ea typeface="Calibri" pitchFamily="34" charset="-122"/>
+                <a:cs typeface="Calibri" pitchFamily="34" charset="-120"/>
+              </a:rPr>
+              <a:t>Without the projector (Activity 4): write the four seasons.</a:t>
+            </a:r>
+            <a:endParaRPr lang="en-US" sz="2000" dirty="0"/>
+          </a:p>
+          <a:p>
+            <a:pPr algn="l" marL="342900" indent="-342900">
+              <a:spcAft>
+                <a:spcPts val="800"/>
+              </a:spcAft>
+              <a:buSzPct val="100000"/>
+              <a:buChar char="•"/>
+            </a:pPr>
+            <a:r>
+              <a:rPr lang="en-US" sz="2000" dirty="0">
+                <a:solidFill>
+                  <a:srgbClr val="111111"/>
+                </a:solidFill>
+                <a:latin typeface="Calibri" pitchFamily="34" charset="0"/>
+                <a:ea typeface="Calibri" pitchFamily="34" charset="-122"/>
+                <a:cs typeface="Calibri" pitchFamily="34" charset="-120"/>
+              </a:rPr>
+              <a:t>Without the projector (Activity 5): describe ice from a fridge.</a:t>
             </a:r>
             <a:endParaRPr lang="en-US" sz="2000" dirty="0"/>
           </a:p>
@@ -21373,7 +21509,7 @@
                 <a:ea typeface="Calibri" pitchFamily="34" charset="-122"/>
                 <a:cs typeface="Calibri" pitchFamily="34" charset="-120"/>
               </a:rPr>
-              <a:t>Photo, Activity 3: “Toronto Winter Maintenance Budget” by MSVG, CC BY 2.0, via Flickr (https://www.flickr.com/photos/13907834@N00/5336969301)</a:t>
+              <a:t>Photo, Activity 3: “Oro Mediterraneo / Mediterranean Gold” by Cristy Valencia, CC BY 2.0, via Flickr (https://www.flickr.com/photos/24522216@N03/5927925845)</a:t>
             </a:r>
             <a:endParaRPr lang="en-US" sz="1800" dirty="0"/>
           </a:p>
@@ -21394,7 +21530,7 @@
                 <a:ea typeface="Calibri" pitchFamily="34" charset="-122"/>
                 <a:cs typeface="Calibri" pitchFamily="34" charset="-120"/>
               </a:rPr>
-              <a:t>Photo, Activity 5: “Oro Mediterraneo / Mediterranean Gold” by Cristy Valencia, CC BY 2.0, via Flickr (https://www.flickr.com/photos/24522216@N03/5927925845)</a:t>
+              <a:t>Photo, Activity 5: “Toronto Winter Maintenance Budget” by MSVG, CC BY 2.0, via Flickr (https://www.flickr.com/photos/13907834@N00/5336969301)</a:t>
             </a:r>
             <a:endParaRPr lang="en-US" sz="1800" dirty="0"/>
           </a:p>

--- a/lecons/F2T/16_S10_L4_P1_Temperate_Location_Types_Climate.pptx
+++ b/lecons/F2T/16_S10_L4_P1_Temperate_Location_Types_Climate.pptx
@@ -3459,7 +3459,7 @@
           <a:p>
             <a:r>
               <a:rPr lang="en-US" dirty="0"/>
-              <a:t>Before we start the new lesson, let us correct the homework I gave you at the end of Lesson 3 (Part 5): The Desert Regions: Human Activities (Farming around Oases). The question was: Look at a world map in your atlas. Find two countries located between 30° and 60° north of the Equator, and write their names. Take out your exercise books.</a:t>
+              <a:t>Before we start the new lesson, let us correct the homework I gave you at the end of Lesson 3 (Part 5): The Desert Regions: Human Activities (Farming around Oases). The question was: Name the four seasons of the temperate region. Take out your exercise books.</a:t>
             </a:r>
             <a:endParaRPr lang="en-US" dirty="0"/>
           </a:p>
@@ -4251,7 +4251,7 @@
           <a:p>
             <a:r>
               <a:rPr lang="en-US" dirty="0"/>
-              <a:t>For your homework: Find a picture of a European forest in autumn in your textbook or on television. Describe the colour of the leaves and say what happens to them in winter. We shall correct it at the beginning of our next lesson.</a:t>
+              <a:t>For your homework: Define a deciduous tree. We shall correct it at the beginning of our next lesson.</a:t>
             </a:r>
             <a:endParaRPr lang="en-US" dirty="0"/>
           </a:p>
@@ -4427,7 +4427,7 @@
           <a:p>
             <a:r>
               <a:rPr lang="en-US" dirty="0"/>
-              <a:t>Here is a good answer. Examples: France, Italy, Germany, the United Kingdom, the USA, Japan and China all lie between 30° and 60° N. Compare it with your own answer and correct your work in red.</a:t>
+              <a:t>Here is a good answer. Spring, summer, autumn and winter. Compare it with your own answer and correct your work in red.</a:t>
             </a:r>
             <a:endParaRPr lang="en-US" dirty="0"/>
           </a:p>
@@ -15060,7 +15060,7 @@
         <p:spPr>
           <a:xfrm>
             <a:off x="0" y="658368"/>
-            <a:ext cx="3840480" cy="5833872"/>
+            <a:ext cx="5120640" cy="5833872"/>
           </a:xfrm>
           <a:prstGeom prst="rect">
             <a:avLst/>
@@ -15075,8 +15075,8 @@
         </p:nvSpPr>
         <p:spPr>
           <a:xfrm>
-            <a:off x="4069080" y="1005840"/>
-            <a:ext cx="7802575" cy="731520"/>
+            <a:off x="5349240" y="1005840"/>
+            <a:ext cx="6522415" cy="731520"/>
           </a:xfrm>
           <a:prstGeom prst="rect">
             <a:avLst/>
@@ -15116,8 +15116,8 @@
         </p:nvSpPr>
         <p:spPr>
           <a:xfrm>
-            <a:off x="4069080" y="1783080"/>
-            <a:ext cx="7802575" cy="4663440"/>
+            <a:off x="5349240" y="1783080"/>
+            <a:ext cx="6522415" cy="4663440"/>
           </a:xfrm>
           <a:prstGeom prst="rect">
             <a:avLst/>
@@ -15164,7 +15164,7 @@
                 <a:ea typeface="Times New Roman" pitchFamily="34" charset="-122"/>
                 <a:cs typeface="Times New Roman" pitchFamily="34" charset="-120"/>
               </a:rPr>
-              <a:t>Look at a world map in your atlas. Find two countries located between 30° and 60° north of the Equator, and write their names.</a:t>
+              <a:t>Name the four seasons of the temperate region.</a:t>
             </a:r>
             <a:endParaRPr lang="en-US" sz="4000" dirty="0"/>
           </a:p>
@@ -17395,7 +17395,7 @@
                 <a:ea typeface="Times New Roman" pitchFamily="34" charset="-122"/>
                 <a:cs typeface="Times New Roman" pitchFamily="34" charset="-120"/>
               </a:rPr>
-              <a:t>Find a picture of a European forest in autumn in your textbook or on television. Describe the colour of the leaves and say what happens to them in winter.</a:t>
+              <a:t>Define a deciduous tree.</a:t>
             </a:r>
             <a:endParaRPr lang="en-US" sz="4000" dirty="0"/>
           </a:p>
@@ -17853,7 +17853,7 @@
                 <a:ea typeface="Times New Roman" pitchFamily="34" charset="-122"/>
                 <a:cs typeface="Times New Roman" pitchFamily="34" charset="-120"/>
               </a:rPr>
-              <a:t>Examples: France, Italy, Germany, the United Kingdom, the USA, Japan and China all lie between 30° and 60° N.</a:t>
+              <a:t>Spring, summer, autumn and winter.</a:t>
             </a:r>
             <a:endParaRPr lang="en-US" sz="4000" dirty="0"/>
           </a:p>
@@ -20554,7 +20554,7 @@
                           <a:ea typeface="Calibri" pitchFamily="34" charset="-122"/>
                           <a:cs typeface="Calibri" pitchFamily="34" charset="-120"/>
                         </a:rPr>
-                        <a:t>Find a picture of a European forest in autumn in your textbook or on television. Describe the colour of the leaves and say what happens to them in winter.</a:t>
+                        <a:t>Define a deciduous tree.</a:t>
                       </a:r>
                       <a:endParaRPr lang="en-US" sz="1600" dirty="0">
                         <a:latin typeface="Calibri" charset="0"/>
